--- a/Weekly-Reports/2023.09.25.pptx
+++ b/Weekly-Reports/2023.09.25.pptx
@@ -246,7 +246,7 @@
           <a:p>
             <a:fld id="{1224017F-B419-455D-B9E9-48696CA0BF31}" type="datetimeFigureOut">
               <a:rPr lang="sv-SE" smtClean="0"/>
-              <a:t>2023-10-26</a:t>
+              <a:t>2024-10-10</a:t>
             </a:fld>
             <a:endParaRPr lang="sv-SE"/>
           </a:p>
@@ -416,7 +416,7 @@
           <a:p>
             <a:fld id="{1224017F-B419-455D-B9E9-48696CA0BF31}" type="datetimeFigureOut">
               <a:rPr lang="sv-SE" smtClean="0"/>
-              <a:t>2023-10-26</a:t>
+              <a:t>2024-10-10</a:t>
             </a:fld>
             <a:endParaRPr lang="sv-SE"/>
           </a:p>
@@ -596,7 +596,7 @@
           <a:p>
             <a:fld id="{1224017F-B419-455D-B9E9-48696CA0BF31}" type="datetimeFigureOut">
               <a:rPr lang="sv-SE" smtClean="0"/>
-              <a:t>2023-10-26</a:t>
+              <a:t>2024-10-10</a:t>
             </a:fld>
             <a:endParaRPr lang="sv-SE"/>
           </a:p>
@@ -766,7 +766,7 @@
           <a:p>
             <a:fld id="{1224017F-B419-455D-B9E9-48696CA0BF31}" type="datetimeFigureOut">
               <a:rPr lang="sv-SE" smtClean="0"/>
-              <a:t>2023-10-26</a:t>
+              <a:t>2024-10-10</a:t>
             </a:fld>
             <a:endParaRPr lang="sv-SE"/>
           </a:p>
@@ -1010,7 +1010,7 @@
           <a:p>
             <a:fld id="{1224017F-B419-455D-B9E9-48696CA0BF31}" type="datetimeFigureOut">
               <a:rPr lang="sv-SE" smtClean="0"/>
-              <a:t>2023-10-26</a:t>
+              <a:t>2024-10-10</a:t>
             </a:fld>
             <a:endParaRPr lang="sv-SE"/>
           </a:p>
@@ -1242,7 +1242,7 @@
           <a:p>
             <a:fld id="{1224017F-B419-455D-B9E9-48696CA0BF31}" type="datetimeFigureOut">
               <a:rPr lang="sv-SE" smtClean="0"/>
-              <a:t>2023-10-26</a:t>
+              <a:t>2024-10-10</a:t>
             </a:fld>
             <a:endParaRPr lang="sv-SE"/>
           </a:p>
@@ -1609,7 +1609,7 @@
           <a:p>
             <a:fld id="{1224017F-B419-455D-B9E9-48696CA0BF31}" type="datetimeFigureOut">
               <a:rPr lang="sv-SE" smtClean="0"/>
-              <a:t>2023-10-26</a:t>
+              <a:t>2024-10-10</a:t>
             </a:fld>
             <a:endParaRPr lang="sv-SE"/>
           </a:p>
@@ -1727,7 +1727,7 @@
           <a:p>
             <a:fld id="{1224017F-B419-455D-B9E9-48696CA0BF31}" type="datetimeFigureOut">
               <a:rPr lang="sv-SE" smtClean="0"/>
-              <a:t>2023-10-26</a:t>
+              <a:t>2024-10-10</a:t>
             </a:fld>
             <a:endParaRPr lang="sv-SE"/>
           </a:p>
@@ -1822,7 +1822,7 @@
           <a:p>
             <a:fld id="{1224017F-B419-455D-B9E9-48696CA0BF31}" type="datetimeFigureOut">
               <a:rPr lang="sv-SE" smtClean="0"/>
-              <a:t>2023-10-26</a:t>
+              <a:t>2024-10-10</a:t>
             </a:fld>
             <a:endParaRPr lang="sv-SE"/>
           </a:p>
@@ -2099,7 +2099,7 @@
           <a:p>
             <a:fld id="{1224017F-B419-455D-B9E9-48696CA0BF31}" type="datetimeFigureOut">
               <a:rPr lang="sv-SE" smtClean="0"/>
-              <a:t>2023-10-26</a:t>
+              <a:t>2024-10-10</a:t>
             </a:fld>
             <a:endParaRPr lang="sv-SE"/>
           </a:p>
@@ -2356,7 +2356,7 @@
           <a:p>
             <a:fld id="{1224017F-B419-455D-B9E9-48696CA0BF31}" type="datetimeFigureOut">
               <a:rPr lang="sv-SE" smtClean="0"/>
-              <a:t>2023-10-26</a:t>
+              <a:t>2024-10-10</a:t>
             </a:fld>
             <a:endParaRPr lang="sv-SE"/>
           </a:p>
@@ -2569,7 +2569,7 @@
           <a:p>
             <a:fld id="{1224017F-B419-455D-B9E9-48696CA0BF31}" type="datetimeFigureOut">
               <a:rPr lang="sv-SE" smtClean="0"/>
-              <a:t>2023-10-26</a:t>
+              <a:t>2024-10-10</a:t>
             </a:fld>
             <a:endParaRPr lang="sv-SE"/>
           </a:p>
@@ -8316,6 +8316,4199 @@
           </a:prstGeom>
         </p:spPr>
       </p:pic>
+      <mc:AlternateContent xmlns:mc="http://schemas.openxmlformats.org/markup-compatibility/2006">
+        <mc:Choice xmlns:a14="http://schemas.microsoft.com/office/drawing/2010/main" Requires="a14">
+          <p:sp>
+            <p:nvSpPr>
+              <p:cNvPr id="6" name="Rectangle 5"/>
+              <p:cNvSpPr/>
+              <p:nvPr/>
+            </p:nvSpPr>
+            <p:spPr>
+              <a:xfrm>
+                <a:off x="11793617" y="7804890"/>
+                <a:ext cx="3517901" cy="731696"/>
+              </a:xfrm>
+              <a:prstGeom prst="rect">
+                <a:avLst/>
+              </a:prstGeom>
+              <a:noFill/>
+              <a:ln>
+                <a:solidFill>
+                  <a:schemeClr val="tx1"/>
+                </a:solidFill>
+              </a:ln>
+            </p:spPr>
+            <p:style>
+              <a:lnRef idx="2">
+                <a:schemeClr val="accent1">
+                  <a:shade val="50000"/>
+                </a:schemeClr>
+              </a:lnRef>
+              <a:fillRef idx="1">
+                <a:schemeClr val="accent1"/>
+              </a:fillRef>
+              <a:effectRef idx="0">
+                <a:schemeClr val="accent1"/>
+              </a:effectRef>
+              <a:fontRef idx="minor">
+                <a:schemeClr val="lt1"/>
+              </a:fontRef>
+            </p:style>
+            <p:txBody>
+              <a:bodyPr rot="0" spcFirstLastPara="0" vertOverflow="overflow" horzOverflow="overflow" vert="horz" wrap="square" lIns="91440" tIns="45720" rIns="91440" bIns="45720" numCol="1" spcCol="0" rtlCol="0" fromWordArt="0" anchor="ctr" anchorCtr="0" forceAA="0" compatLnSpc="1">
+                <a:prstTxWarp prst="textNoShape">
+                  <a:avLst/>
+                </a:prstTxWarp>
+                <a:noAutofit/>
+              </a:bodyPr>
+              <a:lstStyle/>
+              <a:p>
+                <a:pPr algn="ctr"/>
+                <a:r>
+                  <a:rPr lang="en-US" sz="2372" dirty="0">
+                    <a:solidFill>
+                      <a:schemeClr val="tx1"/>
+                    </a:solidFill>
+                    <a:latin typeface="Times New Roman" panose="02020603050405020304" pitchFamily="18" charset="0"/>
+                    <a:cs typeface="Times New Roman" panose="02020603050405020304" pitchFamily="18" charset="0"/>
+                  </a:rPr>
+                  <a:t>Specifications</a:t>
+                </a:r>
+              </a:p>
+              <a:p>
+                <a:pPr algn="ctr"/>
+                <a:r>
+                  <a:rPr lang="en-US" sz="2372" dirty="0">
+                    <a:solidFill>
+                      <a:schemeClr val="tx1"/>
+                    </a:solidFill>
+                    <a:latin typeface="Times New Roman" panose="02020603050405020304" pitchFamily="18" charset="0"/>
+                    <a:cs typeface="Times New Roman" panose="02020603050405020304" pitchFamily="18" charset="0"/>
+                  </a:rPr>
+                  <a:t>P, V, I, </a:t>
+                </a:r>
+                <a14:m>
+                  <m:oMath xmlns:m="http://schemas.openxmlformats.org/officeDocument/2006/math">
+                    <m:r>
+                      <m:rPr>
+                        <m:sty m:val="p"/>
+                      </m:rPr>
+                      <a:rPr lang="en-US" sz="2372">
+                        <a:solidFill>
+                          <a:schemeClr val="tx1"/>
+                        </a:solidFill>
+                        <a:latin typeface="Cambria Math" panose="02040503050406030204" pitchFamily="18" charset="0"/>
+                      </a:rPr>
+                      <m:t>ΔV</m:t>
+                    </m:r>
+                  </m:oMath>
+                </a14:m>
+                <a:r>
+                  <a:rPr lang="sv-SE" sz="2372" dirty="0">
+                    <a:solidFill>
+                      <a:schemeClr val="tx1"/>
+                    </a:solidFill>
+                    <a:latin typeface="Times New Roman" panose="02020603050405020304" pitchFamily="18" charset="0"/>
+                    <a:cs typeface="Times New Roman" panose="02020603050405020304" pitchFamily="18" charset="0"/>
+                  </a:rPr>
+                  <a:t>,</a:t>
+                </a:r>
+                <a14:m>
+                  <m:oMath xmlns:m="http://schemas.openxmlformats.org/officeDocument/2006/math">
+                    <m:r>
+                      <m:rPr>
+                        <m:sty m:val="p"/>
+                      </m:rPr>
+                      <a:rPr lang="en-US" sz="2372">
+                        <a:solidFill>
+                          <a:schemeClr val="tx1"/>
+                        </a:solidFill>
+                        <a:latin typeface="Cambria Math" panose="02040503050406030204" pitchFamily="18" charset="0"/>
+                      </a:rPr>
+                      <m:t>ΔI</m:t>
+                    </m:r>
+                  </m:oMath>
+                </a14:m>
+                <a:endParaRPr lang="sv-SE" sz="2372" dirty="0">
+                  <a:solidFill>
+                    <a:schemeClr val="tx1"/>
+                  </a:solidFill>
+                  <a:latin typeface="Times New Roman" panose="02020603050405020304" pitchFamily="18" charset="0"/>
+                  <a:cs typeface="Times New Roman" panose="02020603050405020304" pitchFamily="18" charset="0"/>
+                </a:endParaRPr>
+              </a:p>
+            </p:txBody>
+          </p:sp>
+        </mc:Choice>
+        <mc:Fallback>
+          <p:sp>
+            <p:nvSpPr>
+              <p:cNvPr id="6" name="Rectangle 5"/>
+              <p:cNvSpPr>
+                <a:spLocks noRot="1" noChangeAspect="1" noMove="1" noResize="1" noEditPoints="1" noAdjustHandles="1" noChangeArrowheads="1" noChangeShapeType="1" noTextEdit="1"/>
+              </p:cNvSpPr>
+              <p:nvPr/>
+            </p:nvSpPr>
+            <p:spPr>
+              <a:xfrm>
+                <a:off x="11793617" y="7804890"/>
+                <a:ext cx="3517901" cy="731696"/>
+              </a:xfrm>
+              <a:prstGeom prst="rect">
+                <a:avLst/>
+              </a:prstGeom>
+              <a:blipFill>
+                <a:blip r:embed="rId3"/>
+                <a:stretch>
+                  <a:fillRect t="-9836" b="-23770"/>
+                </a:stretch>
+              </a:blipFill>
+              <a:ln>
+                <a:solidFill>
+                  <a:schemeClr val="tx1"/>
+                </a:solidFill>
+              </a:ln>
+            </p:spPr>
+            <p:txBody>
+              <a:bodyPr/>
+              <a:lstStyle/>
+              <a:p>
+                <a:r>
+                  <a:rPr lang="sv-SE">
+                    <a:noFill/>
+                  </a:rPr>
+                  <a:t> </a:t>
+                </a:r>
+              </a:p>
+            </p:txBody>
+          </p:sp>
+        </mc:Fallback>
+      </mc:AlternateContent>
+      <p:cxnSp>
+        <p:nvCxnSpPr>
+          <p:cNvPr id="7" name="Straight Arrow Connector 6"/>
+          <p:cNvCxnSpPr>
+            <a:stCxn id="6" idx="2"/>
+            <a:endCxn id="8" idx="0"/>
+          </p:cNvCxnSpPr>
+          <p:nvPr/>
+        </p:nvCxnSpPr>
+        <p:spPr>
+          <a:xfrm>
+            <a:off x="13552565" y="8536587"/>
+            <a:ext cx="0" cy="458298"/>
+          </a:xfrm>
+          <a:prstGeom prst="straightConnector1">
+            <a:avLst/>
+          </a:prstGeom>
+          <a:ln w="12700">
+            <a:solidFill>
+              <a:schemeClr val="tx1"/>
+            </a:solidFill>
+            <a:tailEnd type="triangle"/>
+          </a:ln>
+        </p:spPr>
+        <p:style>
+          <a:lnRef idx="1">
+            <a:schemeClr val="accent1"/>
+          </a:lnRef>
+          <a:fillRef idx="0">
+            <a:schemeClr val="accent1"/>
+          </a:fillRef>
+          <a:effectRef idx="0">
+            <a:schemeClr val="accent1"/>
+          </a:effectRef>
+          <a:fontRef idx="minor">
+            <a:schemeClr val="tx1"/>
+          </a:fontRef>
+        </p:style>
+      </p:cxnSp>
+      <p:sp>
+        <p:nvSpPr>
+          <p:cNvPr id="8" name="Rectangle 7"/>
+          <p:cNvSpPr/>
+          <p:nvPr/>
+        </p:nvSpPr>
+        <p:spPr>
+          <a:xfrm>
+            <a:off x="11793617" y="8994885"/>
+            <a:ext cx="3517901" cy="625762"/>
+          </a:xfrm>
+          <a:prstGeom prst="rect">
+            <a:avLst/>
+          </a:prstGeom>
+          <a:noFill/>
+          <a:ln>
+            <a:solidFill>
+              <a:schemeClr val="tx1"/>
+            </a:solidFill>
+          </a:ln>
+        </p:spPr>
+        <p:style>
+          <a:lnRef idx="2">
+            <a:schemeClr val="accent1">
+              <a:shade val="50000"/>
+            </a:schemeClr>
+          </a:lnRef>
+          <a:fillRef idx="1">
+            <a:schemeClr val="accent1"/>
+          </a:fillRef>
+          <a:effectRef idx="0">
+            <a:schemeClr val="accent1"/>
+          </a:effectRef>
+          <a:fontRef idx="minor">
+            <a:schemeClr val="lt1"/>
+          </a:fontRef>
+        </p:style>
+        <p:txBody>
+          <a:bodyPr rot="0" spcFirstLastPara="0" vertOverflow="overflow" horzOverflow="overflow" vert="horz" wrap="square" lIns="91440" tIns="45720" rIns="91440" bIns="45720" numCol="1" spcCol="0" rtlCol="0" fromWordArt="0" anchor="ctr" anchorCtr="0" forceAA="0" compatLnSpc="1">
+            <a:prstTxWarp prst="textNoShape">
+              <a:avLst/>
+            </a:prstTxWarp>
+            <a:noAutofit/>
+          </a:bodyPr>
+          <a:lstStyle/>
+          <a:p>
+            <a:pPr marL="285726" indent="-285726" algn="ctr">
+              <a:buFont typeface="Arial" panose="020B0604020202020204" pitchFamily="34" charset="0"/>
+              <a:buChar char="•"/>
+            </a:pPr>
+            <a:r>
+              <a:rPr lang="en-US" sz="2372" dirty="0">
+                <a:solidFill>
+                  <a:schemeClr val="tx1"/>
+                </a:solidFill>
+                <a:latin typeface="Times New Roman" panose="02020603050405020304" pitchFamily="18" charset="0"/>
+                <a:cs typeface="Times New Roman" panose="02020603050405020304" pitchFamily="18" charset="0"/>
+              </a:rPr>
+              <a:t>Converter Topology</a:t>
+            </a:r>
+          </a:p>
+          <a:p>
+            <a:pPr marL="285726" indent="-285726" algn="ctr">
+              <a:buFont typeface="Arial" panose="020B0604020202020204" pitchFamily="34" charset="0"/>
+              <a:buChar char="•"/>
+            </a:pPr>
+            <a:r>
+              <a:rPr lang="en-US" sz="2372" dirty="0">
+                <a:solidFill>
+                  <a:schemeClr val="tx1"/>
+                </a:solidFill>
+                <a:latin typeface="Times New Roman" panose="02020603050405020304" pitchFamily="18" charset="0"/>
+                <a:cs typeface="Times New Roman" panose="02020603050405020304" pitchFamily="18" charset="0"/>
+              </a:rPr>
+              <a:t>Modulation Scheme</a:t>
+            </a:r>
+            <a:endParaRPr lang="sv-SE" sz="2372" dirty="0">
+              <a:solidFill>
+                <a:schemeClr val="tx1"/>
+              </a:solidFill>
+              <a:latin typeface="Times New Roman" panose="02020603050405020304" pitchFamily="18" charset="0"/>
+              <a:cs typeface="Times New Roman" panose="02020603050405020304" pitchFamily="18" charset="0"/>
+            </a:endParaRPr>
+          </a:p>
+        </p:txBody>
+      </p:sp>
+      <p:cxnSp>
+        <p:nvCxnSpPr>
+          <p:cNvPr id="9" name="Straight Arrow Connector 8"/>
+          <p:cNvCxnSpPr>
+            <a:stCxn id="8" idx="2"/>
+            <a:endCxn id="10" idx="0"/>
+          </p:cNvCxnSpPr>
+          <p:nvPr/>
+        </p:nvCxnSpPr>
+        <p:spPr>
+          <a:xfrm>
+            <a:off x="13552568" y="9620650"/>
+            <a:ext cx="12699" cy="380565"/>
+          </a:xfrm>
+          <a:prstGeom prst="straightConnector1">
+            <a:avLst/>
+          </a:prstGeom>
+          <a:ln w="12700">
+            <a:solidFill>
+              <a:schemeClr val="tx1"/>
+            </a:solidFill>
+            <a:tailEnd type="triangle"/>
+          </a:ln>
+        </p:spPr>
+        <p:style>
+          <a:lnRef idx="1">
+            <a:schemeClr val="accent1"/>
+          </a:lnRef>
+          <a:fillRef idx="0">
+            <a:schemeClr val="accent1"/>
+          </a:fillRef>
+          <a:effectRef idx="0">
+            <a:schemeClr val="accent1"/>
+          </a:effectRef>
+          <a:fontRef idx="minor">
+            <a:schemeClr val="tx1"/>
+          </a:fontRef>
+        </p:style>
+      </p:cxnSp>
+      <p:sp>
+        <p:nvSpPr>
+          <p:cNvPr id="10" name="Rectangle 9"/>
+          <p:cNvSpPr/>
+          <p:nvPr/>
+        </p:nvSpPr>
+        <p:spPr>
+          <a:xfrm>
+            <a:off x="9507615" y="10001214"/>
+            <a:ext cx="8115298" cy="984757"/>
+          </a:xfrm>
+          <a:prstGeom prst="rect">
+            <a:avLst/>
+          </a:prstGeom>
+          <a:solidFill>
+            <a:srgbClr val="CC0099">
+              <a:alpha val="20000"/>
+            </a:srgbClr>
+          </a:solidFill>
+          <a:ln>
+            <a:solidFill>
+              <a:schemeClr val="tx1"/>
+            </a:solidFill>
+          </a:ln>
+        </p:spPr>
+        <p:style>
+          <a:lnRef idx="2">
+            <a:schemeClr val="accent1">
+              <a:shade val="50000"/>
+            </a:schemeClr>
+          </a:lnRef>
+          <a:fillRef idx="1">
+            <a:schemeClr val="accent1"/>
+          </a:fillRef>
+          <a:effectRef idx="0">
+            <a:schemeClr val="accent1"/>
+          </a:effectRef>
+          <a:fontRef idx="minor">
+            <a:schemeClr val="lt1"/>
+          </a:fontRef>
+        </p:style>
+        <p:txBody>
+          <a:bodyPr rot="0" spcFirstLastPara="0" vertOverflow="overflow" horzOverflow="overflow" vert="horz" wrap="square" lIns="91440" tIns="45720" rIns="91440" bIns="45720" numCol="1" spcCol="0" rtlCol="0" fromWordArt="0" anchor="ctr" anchorCtr="0" forceAA="0" compatLnSpc="1">
+            <a:prstTxWarp prst="textNoShape">
+              <a:avLst/>
+            </a:prstTxWarp>
+            <a:noAutofit/>
+          </a:bodyPr>
+          <a:lstStyle/>
+          <a:p>
+            <a:pPr algn="ctr"/>
+            <a:r>
+              <a:rPr lang="en-US" sz="2372" dirty="0">
+                <a:solidFill>
+                  <a:schemeClr val="tx1"/>
+                </a:solidFill>
+                <a:latin typeface="Times New Roman" panose="02020603050405020304" pitchFamily="18" charset="0"/>
+                <a:cs typeface="Times New Roman" panose="02020603050405020304" pitchFamily="18" charset="0"/>
+              </a:rPr>
+              <a:t>Generating Voltage and Current Waveforms for Leg</a:t>
+            </a:r>
+          </a:p>
+          <a:p>
+            <a:pPr marL="285726" indent="-285726">
+              <a:buFont typeface="Arial" panose="020B0604020202020204" pitchFamily="34" charset="0"/>
+              <a:buChar char="•"/>
+            </a:pPr>
+            <a:r>
+              <a:rPr lang="en-US" sz="2372" dirty="0">
+                <a:solidFill>
+                  <a:schemeClr val="tx1"/>
+                </a:solidFill>
+                <a:latin typeface="Times New Roman" panose="02020603050405020304" pitchFamily="18" charset="0"/>
+                <a:cs typeface="Times New Roman" panose="02020603050405020304" pitchFamily="18" charset="0"/>
+              </a:rPr>
+              <a:t>Time Domain</a:t>
+            </a:r>
+          </a:p>
+          <a:p>
+            <a:pPr marL="285726" indent="-285726">
+              <a:buFont typeface="Arial" panose="020B0604020202020204" pitchFamily="34" charset="0"/>
+              <a:buChar char="•"/>
+            </a:pPr>
+            <a:r>
+              <a:rPr lang="en-US" sz="2372" dirty="0">
+                <a:solidFill>
+                  <a:schemeClr val="tx1"/>
+                </a:solidFill>
+                <a:latin typeface="Times New Roman" panose="02020603050405020304" pitchFamily="18" charset="0"/>
+                <a:cs typeface="Times New Roman" panose="02020603050405020304" pitchFamily="18" charset="0"/>
+              </a:rPr>
+              <a:t>Frequency Domain</a:t>
+            </a:r>
+          </a:p>
+        </p:txBody>
+      </p:sp>
+      <p:sp>
+        <p:nvSpPr>
+          <p:cNvPr id="11" name="Rectangle 10"/>
+          <p:cNvSpPr/>
+          <p:nvPr/>
+        </p:nvSpPr>
+        <p:spPr>
+          <a:xfrm>
+            <a:off x="10818804" y="11469486"/>
+            <a:ext cx="5480222" cy="474877"/>
+          </a:xfrm>
+          <a:prstGeom prst="rect">
+            <a:avLst/>
+          </a:prstGeom>
+          <a:noFill/>
+          <a:ln>
+            <a:solidFill>
+              <a:schemeClr val="tx1"/>
+            </a:solidFill>
+          </a:ln>
+        </p:spPr>
+        <p:style>
+          <a:lnRef idx="2">
+            <a:schemeClr val="accent1">
+              <a:shade val="50000"/>
+            </a:schemeClr>
+          </a:lnRef>
+          <a:fillRef idx="1">
+            <a:schemeClr val="accent1"/>
+          </a:fillRef>
+          <a:effectRef idx="0">
+            <a:schemeClr val="accent1"/>
+          </a:effectRef>
+          <a:fontRef idx="minor">
+            <a:schemeClr val="lt1"/>
+          </a:fontRef>
+        </p:style>
+        <p:txBody>
+          <a:bodyPr rot="0" spcFirstLastPara="0" vertOverflow="overflow" horzOverflow="overflow" vert="horz" wrap="square" lIns="91440" tIns="45720" rIns="91440" bIns="45720" numCol="1" spcCol="0" rtlCol="0" fromWordArt="0" anchor="ctr" anchorCtr="0" forceAA="0" compatLnSpc="1">
+            <a:prstTxWarp prst="textNoShape">
+              <a:avLst/>
+            </a:prstTxWarp>
+            <a:noAutofit/>
+          </a:bodyPr>
+          <a:lstStyle/>
+          <a:p>
+            <a:pPr algn="ctr"/>
+            <a:r>
+              <a:rPr lang="en-US" sz="2372" dirty="0">
+                <a:solidFill>
+                  <a:schemeClr val="tx1"/>
+                </a:solidFill>
+                <a:latin typeface="Times New Roman" panose="02020603050405020304" pitchFamily="18" charset="0"/>
+                <a:cs typeface="Times New Roman" panose="02020603050405020304" pitchFamily="18" charset="0"/>
+              </a:rPr>
+              <a:t>Power Circuit Model </a:t>
+            </a:r>
+          </a:p>
+        </p:txBody>
+      </p:sp>
+      <p:cxnSp>
+        <p:nvCxnSpPr>
+          <p:cNvPr id="12" name="Straight Arrow Connector 11"/>
+          <p:cNvCxnSpPr>
+            <a:stCxn id="10" idx="2"/>
+            <a:endCxn id="11" idx="0"/>
+          </p:cNvCxnSpPr>
+          <p:nvPr/>
+        </p:nvCxnSpPr>
+        <p:spPr>
+          <a:xfrm flipH="1">
+            <a:off x="13558916" y="10985971"/>
+            <a:ext cx="6350" cy="483515"/>
+          </a:xfrm>
+          <a:prstGeom prst="straightConnector1">
+            <a:avLst/>
+          </a:prstGeom>
+          <a:ln w="12700">
+            <a:solidFill>
+              <a:schemeClr val="tx1"/>
+            </a:solidFill>
+            <a:tailEnd type="triangle"/>
+          </a:ln>
+        </p:spPr>
+        <p:style>
+          <a:lnRef idx="1">
+            <a:schemeClr val="accent1"/>
+          </a:lnRef>
+          <a:fillRef idx="0">
+            <a:schemeClr val="accent1"/>
+          </a:fillRef>
+          <a:effectRef idx="0">
+            <a:schemeClr val="accent1"/>
+          </a:effectRef>
+          <a:fontRef idx="minor">
+            <a:schemeClr val="tx1"/>
+          </a:fontRef>
+        </p:style>
+      </p:cxnSp>
+      <p:cxnSp>
+        <p:nvCxnSpPr>
+          <p:cNvPr id="13" name="Straight Arrow Connector 12"/>
+          <p:cNvCxnSpPr>
+            <a:stCxn id="14" idx="1"/>
+            <a:endCxn id="11" idx="3"/>
+          </p:cNvCxnSpPr>
+          <p:nvPr/>
+        </p:nvCxnSpPr>
+        <p:spPr>
+          <a:xfrm flipH="1" flipV="1">
+            <a:off x="16299027" y="11706922"/>
+            <a:ext cx="1323888" cy="4384"/>
+          </a:xfrm>
+          <a:prstGeom prst="straightConnector1">
+            <a:avLst/>
+          </a:prstGeom>
+          <a:ln w="12700">
+            <a:solidFill>
+              <a:schemeClr val="tx1"/>
+            </a:solidFill>
+            <a:tailEnd type="triangle"/>
+          </a:ln>
+        </p:spPr>
+        <p:style>
+          <a:lnRef idx="1">
+            <a:schemeClr val="accent1"/>
+          </a:lnRef>
+          <a:fillRef idx="0">
+            <a:schemeClr val="accent1"/>
+          </a:fillRef>
+          <a:effectRef idx="0">
+            <a:schemeClr val="accent1"/>
+          </a:effectRef>
+          <a:fontRef idx="minor">
+            <a:schemeClr val="tx1"/>
+          </a:fontRef>
+        </p:style>
+      </p:cxnSp>
+      <p:sp>
+        <p:nvSpPr>
+          <p:cNvPr id="14" name="Rectangle 13"/>
+          <p:cNvSpPr/>
+          <p:nvPr/>
+        </p:nvSpPr>
+        <p:spPr>
+          <a:xfrm>
+            <a:off x="17622918" y="11465076"/>
+            <a:ext cx="4914901" cy="492460"/>
+          </a:xfrm>
+          <a:prstGeom prst="rect">
+            <a:avLst/>
+          </a:prstGeom>
+          <a:noFill/>
+          <a:ln>
+            <a:solidFill>
+              <a:schemeClr val="tx1"/>
+            </a:solidFill>
+          </a:ln>
+        </p:spPr>
+        <p:style>
+          <a:lnRef idx="2">
+            <a:schemeClr val="accent1">
+              <a:shade val="50000"/>
+            </a:schemeClr>
+          </a:lnRef>
+          <a:fillRef idx="1">
+            <a:schemeClr val="accent1"/>
+          </a:fillRef>
+          <a:effectRef idx="0">
+            <a:schemeClr val="accent1"/>
+          </a:effectRef>
+          <a:fontRef idx="minor">
+            <a:schemeClr val="lt1"/>
+          </a:fontRef>
+        </p:style>
+        <p:txBody>
+          <a:bodyPr rot="0" spcFirstLastPara="0" vertOverflow="overflow" horzOverflow="overflow" vert="horz" wrap="square" lIns="91440" tIns="45720" rIns="91440" bIns="45720" numCol="1" spcCol="0" rtlCol="0" fromWordArt="0" anchor="ctr" anchorCtr="0" forceAA="0" compatLnSpc="1">
+            <a:prstTxWarp prst="textNoShape">
+              <a:avLst/>
+            </a:prstTxWarp>
+            <a:noAutofit/>
+          </a:bodyPr>
+          <a:lstStyle/>
+          <a:p>
+            <a:pPr algn="ctr"/>
+            <a:r>
+              <a:rPr lang="en-US" sz="2372" dirty="0">
+                <a:solidFill>
+                  <a:schemeClr val="tx1"/>
+                </a:solidFill>
+                <a:latin typeface="Times New Roman" panose="02020603050405020304" pitchFamily="18" charset="0"/>
+                <a:cs typeface="Times New Roman" panose="02020603050405020304" pitchFamily="18" charset="0"/>
+              </a:rPr>
+              <a:t>Switching frequency increase</a:t>
+            </a:r>
+          </a:p>
+        </p:txBody>
+      </p:sp>
+      <p:cxnSp>
+        <p:nvCxnSpPr>
+          <p:cNvPr id="15" name="Straight Arrow Connector 14"/>
+          <p:cNvCxnSpPr>
+            <a:endCxn id="68" idx="0"/>
+          </p:cNvCxnSpPr>
+          <p:nvPr/>
+        </p:nvCxnSpPr>
+        <p:spPr>
+          <a:xfrm>
+            <a:off x="3945151" y="12363180"/>
+            <a:ext cx="1" cy="468814"/>
+          </a:xfrm>
+          <a:prstGeom prst="straightConnector1">
+            <a:avLst/>
+          </a:prstGeom>
+          <a:ln w="12700">
+            <a:solidFill>
+              <a:schemeClr val="tx1"/>
+            </a:solidFill>
+            <a:tailEnd type="triangle"/>
+          </a:ln>
+        </p:spPr>
+        <p:style>
+          <a:lnRef idx="1">
+            <a:schemeClr val="accent1"/>
+          </a:lnRef>
+          <a:fillRef idx="0">
+            <a:schemeClr val="accent1"/>
+          </a:fillRef>
+          <a:effectRef idx="0">
+            <a:schemeClr val="accent1"/>
+          </a:effectRef>
+          <a:fontRef idx="minor">
+            <a:schemeClr val="tx1"/>
+          </a:fontRef>
+        </p:style>
+      </p:cxnSp>
+      <p:cxnSp>
+        <p:nvCxnSpPr>
+          <p:cNvPr id="16" name="Straight Connector 15"/>
+          <p:cNvCxnSpPr/>
+          <p:nvPr/>
+        </p:nvCxnSpPr>
+        <p:spPr>
+          <a:xfrm>
+            <a:off x="3926317" y="12371504"/>
+            <a:ext cx="15908955" cy="28715"/>
+          </a:xfrm>
+          <a:prstGeom prst="line">
+            <a:avLst/>
+          </a:prstGeom>
+          <a:ln w="12700">
+            <a:solidFill>
+              <a:schemeClr val="tx1"/>
+            </a:solidFill>
+          </a:ln>
+        </p:spPr>
+        <p:style>
+          <a:lnRef idx="1">
+            <a:schemeClr val="accent1"/>
+          </a:lnRef>
+          <a:fillRef idx="0">
+            <a:schemeClr val="accent1"/>
+          </a:fillRef>
+          <a:effectRef idx="0">
+            <a:schemeClr val="accent1"/>
+          </a:effectRef>
+          <a:fontRef idx="minor">
+            <a:schemeClr val="tx1"/>
+          </a:fontRef>
+        </p:style>
+      </p:cxnSp>
+      <p:cxnSp>
+        <p:nvCxnSpPr>
+          <p:cNvPr id="17" name="Straight Connector 16"/>
+          <p:cNvCxnSpPr/>
+          <p:nvPr/>
+        </p:nvCxnSpPr>
+        <p:spPr>
+          <a:xfrm>
+            <a:off x="13573722" y="11759650"/>
+            <a:ext cx="2656" cy="604155"/>
+          </a:xfrm>
+          <a:prstGeom prst="line">
+            <a:avLst/>
+          </a:prstGeom>
+          <a:ln w="12700">
+            <a:solidFill>
+              <a:schemeClr val="tx1"/>
+            </a:solidFill>
+          </a:ln>
+        </p:spPr>
+        <p:style>
+          <a:lnRef idx="1">
+            <a:schemeClr val="accent1"/>
+          </a:lnRef>
+          <a:fillRef idx="0">
+            <a:schemeClr val="accent1"/>
+          </a:fillRef>
+          <a:effectRef idx="0">
+            <a:schemeClr val="accent1"/>
+          </a:effectRef>
+          <a:fontRef idx="minor">
+            <a:schemeClr val="tx1"/>
+          </a:fontRef>
+        </p:style>
+      </p:cxnSp>
+      <p:sp>
+        <p:nvSpPr>
+          <p:cNvPr id="18" name="Rectangle 17"/>
+          <p:cNvSpPr/>
+          <p:nvPr/>
+        </p:nvSpPr>
+        <p:spPr>
+          <a:xfrm>
+            <a:off x="8133164" y="12807963"/>
+            <a:ext cx="2191385" cy="1065259"/>
+          </a:xfrm>
+          <a:prstGeom prst="rect">
+            <a:avLst/>
+          </a:prstGeom>
+          <a:noFill/>
+          <a:ln>
+            <a:solidFill>
+              <a:schemeClr val="tx1"/>
+            </a:solidFill>
+          </a:ln>
+        </p:spPr>
+        <p:style>
+          <a:lnRef idx="2">
+            <a:schemeClr val="accent1">
+              <a:shade val="50000"/>
+            </a:schemeClr>
+          </a:lnRef>
+          <a:fillRef idx="1">
+            <a:schemeClr val="accent1"/>
+          </a:fillRef>
+          <a:effectRef idx="0">
+            <a:schemeClr val="accent1"/>
+          </a:effectRef>
+          <a:fontRef idx="minor">
+            <a:schemeClr val="lt1"/>
+          </a:fontRef>
+        </p:style>
+        <p:txBody>
+          <a:bodyPr rot="0" spcFirstLastPara="0" vertOverflow="overflow" horzOverflow="overflow" vert="horz" wrap="square" lIns="91440" tIns="45720" rIns="91440" bIns="45720" numCol="1" spcCol="0" rtlCol="0" fromWordArt="0" anchor="ctr" anchorCtr="0" forceAA="0" compatLnSpc="1">
+            <a:prstTxWarp prst="textNoShape">
+              <a:avLst/>
+            </a:prstTxWarp>
+            <a:noAutofit/>
+          </a:bodyPr>
+          <a:lstStyle/>
+          <a:p>
+            <a:pPr algn="ctr"/>
+            <a:r>
+              <a:rPr lang="en-US" sz="2372" dirty="0">
+                <a:solidFill>
+                  <a:schemeClr val="tx1"/>
+                </a:solidFill>
+                <a:latin typeface="Times New Roman" panose="02020603050405020304" pitchFamily="18" charset="0"/>
+                <a:cs typeface="Times New Roman" panose="02020603050405020304" pitchFamily="18" charset="0"/>
+              </a:rPr>
+              <a:t>Capacitor:</a:t>
+            </a:r>
+          </a:p>
+          <a:p>
+            <a:pPr marL="285726" indent="-285726">
+              <a:buFont typeface="Arial" panose="020B0604020202020204" pitchFamily="34" charset="0"/>
+              <a:buChar char="•"/>
+            </a:pPr>
+            <a:r>
+              <a:rPr lang="en-US" sz="2372" dirty="0">
+                <a:solidFill>
+                  <a:schemeClr val="tx1"/>
+                </a:solidFill>
+                <a:latin typeface="Times New Roman" panose="02020603050405020304" pitchFamily="18" charset="0"/>
+                <a:cs typeface="Times New Roman" panose="02020603050405020304" pitchFamily="18" charset="0"/>
+              </a:rPr>
+              <a:t> Type</a:t>
+            </a:r>
+          </a:p>
+          <a:p>
+            <a:pPr marL="285726" indent="-285726">
+              <a:buFont typeface="Arial" panose="020B0604020202020204" pitchFamily="34" charset="0"/>
+              <a:buChar char="•"/>
+            </a:pPr>
+            <a:r>
+              <a:rPr lang="en-US" sz="2372" dirty="0">
+                <a:solidFill>
+                  <a:schemeClr val="tx1"/>
+                </a:solidFill>
+                <a:latin typeface="Times New Roman" panose="02020603050405020304" pitchFamily="18" charset="0"/>
+                <a:cs typeface="Times New Roman" panose="02020603050405020304" pitchFamily="18" charset="0"/>
+              </a:rPr>
+              <a:t>Value </a:t>
+            </a:r>
+          </a:p>
+        </p:txBody>
+      </p:sp>
+      <p:cxnSp>
+        <p:nvCxnSpPr>
+          <p:cNvPr id="19" name="Straight Arrow Connector 18"/>
+          <p:cNvCxnSpPr>
+            <a:stCxn id="18" idx="2"/>
+            <a:endCxn id="20" idx="0"/>
+          </p:cNvCxnSpPr>
+          <p:nvPr/>
+        </p:nvCxnSpPr>
+        <p:spPr>
+          <a:xfrm>
+            <a:off x="9228852" y="13873219"/>
+            <a:ext cx="176" cy="412364"/>
+          </a:xfrm>
+          <a:prstGeom prst="straightConnector1">
+            <a:avLst/>
+          </a:prstGeom>
+          <a:ln w="12700">
+            <a:solidFill>
+              <a:schemeClr val="tx1"/>
+            </a:solidFill>
+            <a:tailEnd type="triangle"/>
+          </a:ln>
+        </p:spPr>
+        <p:style>
+          <a:lnRef idx="1">
+            <a:schemeClr val="accent1"/>
+          </a:lnRef>
+          <a:fillRef idx="0">
+            <a:schemeClr val="accent1"/>
+          </a:fillRef>
+          <a:effectRef idx="0">
+            <a:schemeClr val="accent1"/>
+          </a:effectRef>
+          <a:fontRef idx="minor">
+            <a:schemeClr val="tx1"/>
+          </a:fontRef>
+        </p:style>
+      </p:cxnSp>
+      <p:sp>
+        <p:nvSpPr>
+          <p:cNvPr id="20" name="Rectangle 19"/>
+          <p:cNvSpPr/>
+          <p:nvPr/>
+        </p:nvSpPr>
+        <p:spPr>
+          <a:xfrm>
+            <a:off x="8091384" y="14285583"/>
+            <a:ext cx="2275288" cy="1323828"/>
+          </a:xfrm>
+          <a:prstGeom prst="rect">
+            <a:avLst/>
+          </a:prstGeom>
+          <a:solidFill>
+            <a:srgbClr val="CC0000">
+              <a:alpha val="20000"/>
+            </a:srgbClr>
+          </a:solidFill>
+          <a:ln>
+            <a:solidFill>
+              <a:schemeClr val="tx1"/>
+            </a:solidFill>
+          </a:ln>
+        </p:spPr>
+        <p:style>
+          <a:lnRef idx="2">
+            <a:schemeClr val="accent1">
+              <a:shade val="50000"/>
+            </a:schemeClr>
+          </a:lnRef>
+          <a:fillRef idx="1">
+            <a:schemeClr val="accent1"/>
+          </a:fillRef>
+          <a:effectRef idx="0">
+            <a:schemeClr val="accent1"/>
+          </a:effectRef>
+          <a:fontRef idx="minor">
+            <a:schemeClr val="lt1"/>
+          </a:fontRef>
+        </p:style>
+        <p:txBody>
+          <a:bodyPr rot="0" spcFirstLastPara="0" vertOverflow="overflow" horzOverflow="overflow" vert="horz" wrap="square" lIns="91440" tIns="45720" rIns="91440" bIns="45720" numCol="1" spcCol="0" rtlCol="0" fromWordArt="0" anchor="ctr" anchorCtr="0" forceAA="0" compatLnSpc="1">
+            <a:prstTxWarp prst="textNoShape">
+              <a:avLst/>
+            </a:prstTxWarp>
+            <a:noAutofit/>
+          </a:bodyPr>
+          <a:lstStyle/>
+          <a:p>
+            <a:pPr algn="ctr"/>
+            <a:r>
+              <a:rPr lang="en-US" sz="2372" dirty="0">
+                <a:solidFill>
+                  <a:schemeClr val="tx1"/>
+                </a:solidFill>
+                <a:latin typeface="Times New Roman" panose="02020603050405020304" pitchFamily="18" charset="0"/>
+                <a:cs typeface="Times New Roman" panose="02020603050405020304" pitchFamily="18" charset="0"/>
+              </a:rPr>
+              <a:t>Estimation:</a:t>
+            </a:r>
+          </a:p>
+          <a:p>
+            <a:pPr marL="342873" indent="-342873">
+              <a:buFont typeface="Arial" panose="020B0604020202020204" pitchFamily="34" charset="0"/>
+              <a:buChar char="•"/>
+            </a:pPr>
+            <a:r>
+              <a:rPr lang="en-US" sz="2372" dirty="0">
+                <a:solidFill>
+                  <a:schemeClr val="tx1"/>
+                </a:solidFill>
+                <a:latin typeface="Times New Roman" panose="02020603050405020304" pitchFamily="18" charset="0"/>
+                <a:cs typeface="Times New Roman" panose="02020603050405020304" pitchFamily="18" charset="0"/>
+              </a:rPr>
+              <a:t>Sizing </a:t>
+            </a:r>
+          </a:p>
+          <a:p>
+            <a:pPr marL="342873" indent="-342873">
+              <a:buFont typeface="Arial" panose="020B0604020202020204" pitchFamily="34" charset="0"/>
+              <a:buChar char="•"/>
+            </a:pPr>
+            <a:r>
+              <a:rPr lang="en-US" sz="2372" dirty="0">
+                <a:solidFill>
+                  <a:schemeClr val="tx1"/>
+                </a:solidFill>
+                <a:latin typeface="Times New Roman" panose="02020603050405020304" pitchFamily="18" charset="0"/>
+                <a:cs typeface="Times New Roman" panose="02020603050405020304" pitchFamily="18" charset="0"/>
+              </a:rPr>
+              <a:t>Cost</a:t>
+            </a:r>
+          </a:p>
+          <a:p>
+            <a:pPr marL="342873" indent="-342873">
+              <a:buFont typeface="Arial" panose="020B0604020202020204" pitchFamily="34" charset="0"/>
+              <a:buChar char="•"/>
+            </a:pPr>
+            <a:r>
+              <a:rPr lang="en-US" sz="2372" dirty="0">
+                <a:solidFill>
+                  <a:schemeClr val="tx1"/>
+                </a:solidFill>
+                <a:latin typeface="Times New Roman" panose="02020603050405020304" pitchFamily="18" charset="0"/>
+                <a:cs typeface="Times New Roman" panose="02020603050405020304" pitchFamily="18" charset="0"/>
+              </a:rPr>
+              <a:t>Loss</a:t>
+            </a:r>
+          </a:p>
+        </p:txBody>
+      </p:sp>
+      <p:cxnSp>
+        <p:nvCxnSpPr>
+          <p:cNvPr id="21" name="Straight Arrow Connector 20"/>
+          <p:cNvCxnSpPr/>
+          <p:nvPr/>
+        </p:nvCxnSpPr>
+        <p:spPr>
+          <a:xfrm flipH="1">
+            <a:off x="8181799" y="15609411"/>
+            <a:ext cx="56060" cy="5936652"/>
+          </a:xfrm>
+          <a:prstGeom prst="straightConnector1">
+            <a:avLst/>
+          </a:prstGeom>
+          <a:ln w="12700">
+            <a:solidFill>
+              <a:schemeClr val="tx1"/>
+            </a:solidFill>
+            <a:tailEnd type="triangle"/>
+          </a:ln>
+        </p:spPr>
+        <p:style>
+          <a:lnRef idx="1">
+            <a:schemeClr val="accent1"/>
+          </a:lnRef>
+          <a:fillRef idx="0">
+            <a:schemeClr val="accent1"/>
+          </a:fillRef>
+          <a:effectRef idx="0">
+            <a:schemeClr val="accent1"/>
+          </a:effectRef>
+          <a:fontRef idx="minor">
+            <a:schemeClr val="tx1"/>
+          </a:fontRef>
+        </p:style>
+      </p:cxnSp>
+      <p:cxnSp>
+        <p:nvCxnSpPr>
+          <p:cNvPr id="22" name="Straight Arrow Connector 21"/>
+          <p:cNvCxnSpPr/>
+          <p:nvPr/>
+        </p:nvCxnSpPr>
+        <p:spPr>
+          <a:xfrm flipH="1">
+            <a:off x="9035603" y="15591640"/>
+            <a:ext cx="49196" cy="5954425"/>
+          </a:xfrm>
+          <a:prstGeom prst="straightConnector1">
+            <a:avLst/>
+          </a:prstGeom>
+          <a:ln w="12700">
+            <a:solidFill>
+              <a:schemeClr val="tx1"/>
+            </a:solidFill>
+            <a:tailEnd type="triangle"/>
+          </a:ln>
+        </p:spPr>
+        <p:style>
+          <a:lnRef idx="1">
+            <a:schemeClr val="accent1"/>
+          </a:lnRef>
+          <a:fillRef idx="0">
+            <a:schemeClr val="accent1"/>
+          </a:fillRef>
+          <a:effectRef idx="0">
+            <a:schemeClr val="accent1"/>
+          </a:effectRef>
+          <a:fontRef idx="minor">
+            <a:schemeClr val="tx1"/>
+          </a:fontRef>
+        </p:style>
+      </p:cxnSp>
+      <p:cxnSp>
+        <p:nvCxnSpPr>
+          <p:cNvPr id="23" name="Straight Arrow Connector 22"/>
+          <p:cNvCxnSpPr/>
+          <p:nvPr/>
+        </p:nvCxnSpPr>
+        <p:spPr>
+          <a:xfrm flipH="1">
+            <a:off x="9938135" y="15609411"/>
+            <a:ext cx="24595" cy="5936652"/>
+          </a:xfrm>
+          <a:prstGeom prst="straightConnector1">
+            <a:avLst/>
+          </a:prstGeom>
+          <a:ln w="12700">
+            <a:solidFill>
+              <a:schemeClr val="tx1"/>
+            </a:solidFill>
+            <a:tailEnd type="triangle"/>
+          </a:ln>
+        </p:spPr>
+        <p:style>
+          <a:lnRef idx="1">
+            <a:schemeClr val="accent1"/>
+          </a:lnRef>
+          <a:fillRef idx="0">
+            <a:schemeClr val="accent1"/>
+          </a:fillRef>
+          <a:effectRef idx="0">
+            <a:schemeClr val="accent1"/>
+          </a:effectRef>
+          <a:fontRef idx="minor">
+            <a:schemeClr val="tx1"/>
+          </a:fontRef>
+        </p:style>
+      </p:cxnSp>
+      <p:sp>
+        <p:nvSpPr>
+          <p:cNvPr id="24" name="TextBox 23"/>
+          <p:cNvSpPr txBox="1"/>
+          <p:nvPr/>
+        </p:nvSpPr>
+        <p:spPr>
+          <a:xfrm>
+            <a:off x="7704423" y="16098276"/>
+            <a:ext cx="1458444" cy="707886"/>
+          </a:xfrm>
+          <a:prstGeom prst="rect">
+            <a:avLst/>
+          </a:prstGeom>
+          <a:noFill/>
+        </p:spPr>
+        <p:txBody>
+          <a:bodyPr wrap="square" rtlCol="0">
+            <a:spAutoFit/>
+          </a:bodyPr>
+          <a:lstStyle/>
+          <a:p>
+            <a:r>
+              <a:rPr lang="en-US" sz="2000" dirty="0">
+                <a:latin typeface="Times New Roman" panose="02020603050405020304" pitchFamily="18" charset="0"/>
+                <a:cs typeface="Times New Roman" panose="02020603050405020304" pitchFamily="18" charset="0"/>
+              </a:rPr>
+              <a:t>Capacitor</a:t>
+            </a:r>
+          </a:p>
+          <a:p>
+            <a:r>
+              <a:rPr lang="en-US" sz="2000" dirty="0">
+                <a:latin typeface="Times New Roman" panose="02020603050405020304" pitchFamily="18" charset="0"/>
+                <a:cs typeface="Times New Roman" panose="02020603050405020304" pitchFamily="18" charset="0"/>
+              </a:rPr>
+              <a:t> Volume</a:t>
+            </a:r>
+            <a:endParaRPr lang="sv-SE" sz="2000" dirty="0">
+              <a:latin typeface="Times New Roman" panose="02020603050405020304" pitchFamily="18" charset="0"/>
+              <a:cs typeface="Times New Roman" panose="02020603050405020304" pitchFamily="18" charset="0"/>
+            </a:endParaRPr>
+          </a:p>
+        </p:txBody>
+      </p:sp>
+      <p:sp>
+        <p:nvSpPr>
+          <p:cNvPr id="25" name="TextBox 24"/>
+          <p:cNvSpPr txBox="1"/>
+          <p:nvPr/>
+        </p:nvSpPr>
+        <p:spPr>
+          <a:xfrm>
+            <a:off x="8426131" y="17122792"/>
+            <a:ext cx="1458444" cy="707886"/>
+          </a:xfrm>
+          <a:prstGeom prst="rect">
+            <a:avLst/>
+          </a:prstGeom>
+          <a:noFill/>
+        </p:spPr>
+        <p:txBody>
+          <a:bodyPr wrap="square" rtlCol="0">
+            <a:spAutoFit/>
+          </a:bodyPr>
+          <a:lstStyle/>
+          <a:p>
+            <a:r>
+              <a:rPr lang="en-US" sz="2000" dirty="0">
+                <a:latin typeface="Times New Roman" panose="02020603050405020304" pitchFamily="18" charset="0"/>
+                <a:cs typeface="Times New Roman" panose="02020603050405020304" pitchFamily="18" charset="0"/>
+              </a:rPr>
+              <a:t>Capacitor</a:t>
+            </a:r>
+          </a:p>
+          <a:p>
+            <a:r>
+              <a:rPr lang="en-US" sz="2000" dirty="0">
+                <a:latin typeface="Times New Roman" panose="02020603050405020304" pitchFamily="18" charset="0"/>
+                <a:cs typeface="Times New Roman" panose="02020603050405020304" pitchFamily="18" charset="0"/>
+              </a:rPr>
+              <a:t> Cost</a:t>
+            </a:r>
+            <a:endParaRPr lang="sv-SE" sz="2000" dirty="0">
+              <a:latin typeface="Times New Roman" panose="02020603050405020304" pitchFamily="18" charset="0"/>
+              <a:cs typeface="Times New Roman" panose="02020603050405020304" pitchFamily="18" charset="0"/>
+            </a:endParaRPr>
+          </a:p>
+        </p:txBody>
+      </p:sp>
+      <p:sp>
+        <p:nvSpPr>
+          <p:cNvPr id="26" name="TextBox 25"/>
+          <p:cNvSpPr txBox="1"/>
+          <p:nvPr/>
+        </p:nvSpPr>
+        <p:spPr>
+          <a:xfrm>
+            <a:off x="9451270" y="18335453"/>
+            <a:ext cx="1458444" cy="707886"/>
+          </a:xfrm>
+          <a:prstGeom prst="rect">
+            <a:avLst/>
+          </a:prstGeom>
+          <a:noFill/>
+        </p:spPr>
+        <p:txBody>
+          <a:bodyPr wrap="square" rtlCol="0">
+            <a:spAutoFit/>
+          </a:bodyPr>
+          <a:lstStyle/>
+          <a:p>
+            <a:r>
+              <a:rPr lang="en-US" sz="2000" dirty="0">
+                <a:latin typeface="Times New Roman" panose="02020603050405020304" pitchFamily="18" charset="0"/>
+                <a:cs typeface="Times New Roman" panose="02020603050405020304" pitchFamily="18" charset="0"/>
+              </a:rPr>
+              <a:t>Capacitor</a:t>
+            </a:r>
+          </a:p>
+          <a:p>
+            <a:r>
+              <a:rPr lang="en-US" sz="2000" dirty="0">
+                <a:latin typeface="Times New Roman" panose="02020603050405020304" pitchFamily="18" charset="0"/>
+                <a:cs typeface="Times New Roman" panose="02020603050405020304" pitchFamily="18" charset="0"/>
+              </a:rPr>
+              <a:t> Loss</a:t>
+            </a:r>
+            <a:endParaRPr lang="sv-SE" sz="2000" dirty="0">
+              <a:latin typeface="Times New Roman" panose="02020603050405020304" pitchFamily="18" charset="0"/>
+              <a:cs typeface="Times New Roman" panose="02020603050405020304" pitchFamily="18" charset="0"/>
+            </a:endParaRPr>
+          </a:p>
+        </p:txBody>
+      </p:sp>
+      <p:sp>
+        <p:nvSpPr>
+          <p:cNvPr id="27" name="Rectangle 26"/>
+          <p:cNvSpPr/>
+          <p:nvPr/>
+        </p:nvSpPr>
+        <p:spPr>
+          <a:xfrm>
+            <a:off x="6539299" y="21561273"/>
+            <a:ext cx="14679177" cy="544192"/>
+          </a:xfrm>
+          <a:prstGeom prst="rect">
+            <a:avLst/>
+          </a:prstGeom>
+          <a:noFill/>
+          <a:ln>
+            <a:solidFill>
+              <a:schemeClr val="tx1"/>
+            </a:solidFill>
+          </a:ln>
+        </p:spPr>
+        <p:style>
+          <a:lnRef idx="2">
+            <a:schemeClr val="accent1">
+              <a:shade val="50000"/>
+            </a:schemeClr>
+          </a:lnRef>
+          <a:fillRef idx="1">
+            <a:schemeClr val="accent1"/>
+          </a:fillRef>
+          <a:effectRef idx="0">
+            <a:schemeClr val="accent1"/>
+          </a:effectRef>
+          <a:fontRef idx="minor">
+            <a:schemeClr val="lt1"/>
+          </a:fontRef>
+        </p:style>
+        <p:txBody>
+          <a:bodyPr rot="0" spcFirstLastPara="0" vertOverflow="overflow" horzOverflow="overflow" vert="horz" wrap="square" lIns="91440" tIns="45720" rIns="91440" bIns="45720" numCol="1" spcCol="0" rtlCol="0" fromWordArt="0" anchor="ctr" anchorCtr="0" forceAA="0" compatLnSpc="1">
+            <a:prstTxWarp prst="textNoShape">
+              <a:avLst/>
+            </a:prstTxWarp>
+            <a:noAutofit/>
+          </a:bodyPr>
+          <a:lstStyle/>
+          <a:p>
+            <a:pPr algn="ctr"/>
+            <a:r>
+              <a:rPr lang="en-US" sz="2372" dirty="0" smtClean="0">
+                <a:solidFill>
+                  <a:schemeClr val="tx1"/>
+                </a:solidFill>
+                <a:latin typeface="Times New Roman" panose="02020603050405020304" pitchFamily="18" charset="0"/>
+                <a:cs typeface="Times New Roman" panose="02020603050405020304" pitchFamily="18" charset="0"/>
+              </a:rPr>
+              <a:t>Volume/Cost/Loss/Carbon Emission</a:t>
+            </a:r>
+            <a:endParaRPr lang="en-US" sz="2372" dirty="0">
+              <a:solidFill>
+                <a:schemeClr val="tx1"/>
+              </a:solidFill>
+              <a:latin typeface="Times New Roman" panose="02020603050405020304" pitchFamily="18" charset="0"/>
+              <a:cs typeface="Times New Roman" panose="02020603050405020304" pitchFamily="18" charset="0"/>
+            </a:endParaRPr>
+          </a:p>
+        </p:txBody>
+      </p:sp>
+      <p:cxnSp>
+        <p:nvCxnSpPr>
+          <p:cNvPr id="28" name="Straight Arrow Connector 27"/>
+          <p:cNvCxnSpPr/>
+          <p:nvPr/>
+        </p:nvCxnSpPr>
+        <p:spPr>
+          <a:xfrm>
+            <a:off x="13579118" y="12363798"/>
+            <a:ext cx="0" cy="444158"/>
+          </a:xfrm>
+          <a:prstGeom prst="straightConnector1">
+            <a:avLst/>
+          </a:prstGeom>
+          <a:ln w="12700">
+            <a:solidFill>
+              <a:schemeClr val="tx1"/>
+            </a:solidFill>
+            <a:tailEnd type="triangle"/>
+          </a:ln>
+        </p:spPr>
+        <p:style>
+          <a:lnRef idx="1">
+            <a:schemeClr val="accent1"/>
+          </a:lnRef>
+          <a:fillRef idx="0">
+            <a:schemeClr val="accent1"/>
+          </a:fillRef>
+          <a:effectRef idx="0">
+            <a:schemeClr val="accent1"/>
+          </a:effectRef>
+          <a:fontRef idx="minor">
+            <a:schemeClr val="tx1"/>
+          </a:fontRef>
+        </p:style>
+      </p:cxnSp>
+      <p:sp>
+        <p:nvSpPr>
+          <p:cNvPr id="29" name="Rectangle 28"/>
+          <p:cNvSpPr/>
+          <p:nvPr/>
+        </p:nvSpPr>
+        <p:spPr>
+          <a:xfrm>
+            <a:off x="12290161" y="12790946"/>
+            <a:ext cx="2550210" cy="1242367"/>
+          </a:xfrm>
+          <a:prstGeom prst="rect">
+            <a:avLst/>
+          </a:prstGeom>
+          <a:noFill/>
+          <a:ln>
+            <a:solidFill>
+              <a:schemeClr val="tx1"/>
+            </a:solidFill>
+          </a:ln>
+        </p:spPr>
+        <p:style>
+          <a:lnRef idx="2">
+            <a:schemeClr val="accent1">
+              <a:shade val="50000"/>
+            </a:schemeClr>
+          </a:lnRef>
+          <a:fillRef idx="1">
+            <a:schemeClr val="accent1"/>
+          </a:fillRef>
+          <a:effectRef idx="0">
+            <a:schemeClr val="accent1"/>
+          </a:effectRef>
+          <a:fontRef idx="minor">
+            <a:schemeClr val="lt1"/>
+          </a:fontRef>
+        </p:style>
+        <p:txBody>
+          <a:bodyPr rot="0" spcFirstLastPara="0" vertOverflow="overflow" horzOverflow="overflow" vert="horz" wrap="square" lIns="91440" tIns="45720" rIns="91440" bIns="45720" numCol="1" spcCol="0" rtlCol="0" fromWordArt="0" anchor="ctr" anchorCtr="0" forceAA="0" compatLnSpc="1">
+            <a:prstTxWarp prst="textNoShape">
+              <a:avLst/>
+            </a:prstTxWarp>
+            <a:noAutofit/>
+          </a:bodyPr>
+          <a:lstStyle/>
+          <a:p>
+            <a:pPr algn="ctr"/>
+            <a:r>
+              <a:rPr lang="en-US" sz="2372" dirty="0">
+                <a:solidFill>
+                  <a:schemeClr val="tx1"/>
+                </a:solidFill>
+                <a:latin typeface="Times New Roman" panose="02020603050405020304" pitchFamily="18" charset="0"/>
+                <a:cs typeface="Times New Roman" panose="02020603050405020304" pitchFamily="18" charset="0"/>
+              </a:rPr>
+              <a:t>Semiconductor:</a:t>
+            </a:r>
+          </a:p>
+          <a:p>
+            <a:pPr marL="285726" indent="-285726">
+              <a:buFont typeface="Arial" panose="020B0604020202020204" pitchFamily="34" charset="0"/>
+              <a:buChar char="•"/>
+            </a:pPr>
+            <a:r>
+              <a:rPr lang="en-US" sz="2372" dirty="0">
+                <a:solidFill>
+                  <a:schemeClr val="tx1"/>
+                </a:solidFill>
+                <a:latin typeface="Times New Roman" panose="02020603050405020304" pitchFamily="18" charset="0"/>
+                <a:cs typeface="Times New Roman" panose="02020603050405020304" pitchFamily="18" charset="0"/>
+              </a:rPr>
+              <a:t>Type</a:t>
+            </a:r>
+          </a:p>
+          <a:p>
+            <a:pPr marL="285726" indent="-285726">
+              <a:buFont typeface="Arial" panose="020B0604020202020204" pitchFamily="34" charset="0"/>
+              <a:buChar char="•"/>
+            </a:pPr>
+            <a:r>
+              <a:rPr lang="en-US" sz="2372" dirty="0">
+                <a:solidFill>
+                  <a:schemeClr val="tx1"/>
+                </a:solidFill>
+                <a:latin typeface="Times New Roman" panose="02020603050405020304" pitchFamily="18" charset="0"/>
+                <a:cs typeface="Times New Roman" panose="02020603050405020304" pitchFamily="18" charset="0"/>
+              </a:rPr>
+              <a:t>Voltage Rating </a:t>
+            </a:r>
+          </a:p>
+        </p:txBody>
+      </p:sp>
+      <p:cxnSp>
+        <p:nvCxnSpPr>
+          <p:cNvPr id="30" name="Straight Arrow Connector 29"/>
+          <p:cNvCxnSpPr>
+            <a:stCxn id="29" idx="2"/>
+            <a:endCxn id="31" idx="0"/>
+          </p:cNvCxnSpPr>
+          <p:nvPr/>
+        </p:nvCxnSpPr>
+        <p:spPr>
+          <a:xfrm>
+            <a:off x="13565264" y="14033309"/>
+            <a:ext cx="0" cy="588998"/>
+          </a:xfrm>
+          <a:prstGeom prst="straightConnector1">
+            <a:avLst/>
+          </a:prstGeom>
+          <a:ln w="12700">
+            <a:solidFill>
+              <a:schemeClr val="tx1"/>
+            </a:solidFill>
+            <a:tailEnd type="triangle"/>
+          </a:ln>
+        </p:spPr>
+        <p:style>
+          <a:lnRef idx="1">
+            <a:schemeClr val="accent1"/>
+          </a:lnRef>
+          <a:fillRef idx="0">
+            <a:schemeClr val="accent1"/>
+          </a:fillRef>
+          <a:effectRef idx="0">
+            <a:schemeClr val="accent1"/>
+          </a:effectRef>
+          <a:fontRef idx="minor">
+            <a:schemeClr val="tx1"/>
+          </a:fontRef>
+        </p:style>
+      </p:cxnSp>
+      <p:sp>
+        <p:nvSpPr>
+          <p:cNvPr id="31" name="Rectangle 30"/>
+          <p:cNvSpPr/>
+          <p:nvPr/>
+        </p:nvSpPr>
+        <p:spPr>
+          <a:xfrm>
+            <a:off x="12290161" y="14622312"/>
+            <a:ext cx="2550210" cy="561271"/>
+          </a:xfrm>
+          <a:prstGeom prst="rect">
+            <a:avLst/>
+          </a:prstGeom>
+          <a:noFill/>
+          <a:ln>
+            <a:solidFill>
+              <a:schemeClr val="tx1"/>
+            </a:solidFill>
+          </a:ln>
+        </p:spPr>
+        <p:style>
+          <a:lnRef idx="2">
+            <a:schemeClr val="accent1">
+              <a:shade val="50000"/>
+            </a:schemeClr>
+          </a:lnRef>
+          <a:fillRef idx="1">
+            <a:schemeClr val="accent1"/>
+          </a:fillRef>
+          <a:effectRef idx="0">
+            <a:schemeClr val="accent1"/>
+          </a:effectRef>
+          <a:fontRef idx="minor">
+            <a:schemeClr val="lt1"/>
+          </a:fontRef>
+        </p:style>
+        <p:txBody>
+          <a:bodyPr rot="0" spcFirstLastPara="0" vertOverflow="overflow" horzOverflow="overflow" vert="horz" wrap="square" lIns="91440" tIns="45720" rIns="91440" bIns="45720" numCol="1" spcCol="0" rtlCol="0" fromWordArt="0" anchor="ctr" anchorCtr="0" forceAA="0" compatLnSpc="1">
+            <a:prstTxWarp prst="textNoShape">
+              <a:avLst/>
+            </a:prstTxWarp>
+            <a:noAutofit/>
+          </a:bodyPr>
+          <a:lstStyle/>
+          <a:p>
+            <a:pPr algn="ctr"/>
+            <a:r>
+              <a:rPr lang="en-US" sz="2372" dirty="0">
+                <a:solidFill>
+                  <a:schemeClr val="tx1"/>
+                </a:solidFill>
+                <a:latin typeface="Times New Roman" panose="02020603050405020304" pitchFamily="18" charset="0"/>
+                <a:cs typeface="Times New Roman" panose="02020603050405020304" pitchFamily="18" charset="0"/>
+              </a:rPr>
+              <a:t>Die Area Selection </a:t>
+            </a:r>
+          </a:p>
+        </p:txBody>
+      </p:sp>
+      <p:cxnSp>
+        <p:nvCxnSpPr>
+          <p:cNvPr id="32" name="Straight Arrow Connector 31"/>
+          <p:cNvCxnSpPr/>
+          <p:nvPr/>
+        </p:nvCxnSpPr>
+        <p:spPr>
+          <a:xfrm flipV="1">
+            <a:off x="11452956" y="14875810"/>
+            <a:ext cx="882983" cy="4340"/>
+          </a:xfrm>
+          <a:prstGeom prst="straightConnector1">
+            <a:avLst/>
+          </a:prstGeom>
+          <a:ln w="12700">
+            <a:solidFill>
+              <a:schemeClr val="tx1"/>
+            </a:solidFill>
+            <a:tailEnd type="triangle"/>
+          </a:ln>
+        </p:spPr>
+        <p:style>
+          <a:lnRef idx="1">
+            <a:schemeClr val="accent1"/>
+          </a:lnRef>
+          <a:fillRef idx="0">
+            <a:schemeClr val="accent1"/>
+          </a:fillRef>
+          <a:effectRef idx="0">
+            <a:schemeClr val="accent1"/>
+          </a:effectRef>
+          <a:fontRef idx="minor">
+            <a:schemeClr val="tx1"/>
+          </a:fontRef>
+        </p:style>
+      </p:cxnSp>
+      <p:cxnSp>
+        <p:nvCxnSpPr>
+          <p:cNvPr id="33" name="Straight Connector 32"/>
+          <p:cNvCxnSpPr/>
+          <p:nvPr/>
+        </p:nvCxnSpPr>
+        <p:spPr>
+          <a:xfrm>
+            <a:off x="11452952" y="14880153"/>
+            <a:ext cx="0" cy="1342813"/>
+          </a:xfrm>
+          <a:prstGeom prst="line">
+            <a:avLst/>
+          </a:prstGeom>
+          <a:ln w="12700">
+            <a:solidFill>
+              <a:schemeClr val="tx1"/>
+            </a:solidFill>
+          </a:ln>
+        </p:spPr>
+        <p:style>
+          <a:lnRef idx="1">
+            <a:schemeClr val="accent1"/>
+          </a:lnRef>
+          <a:fillRef idx="0">
+            <a:schemeClr val="accent1"/>
+          </a:fillRef>
+          <a:effectRef idx="0">
+            <a:schemeClr val="accent1"/>
+          </a:effectRef>
+          <a:fontRef idx="minor">
+            <a:schemeClr val="tx1"/>
+          </a:fontRef>
+        </p:style>
+      </p:cxnSp>
+      <p:sp>
+        <p:nvSpPr>
+          <p:cNvPr id="34" name="TextBox 33"/>
+          <p:cNvSpPr txBox="1"/>
+          <p:nvPr/>
+        </p:nvSpPr>
+        <p:spPr>
+          <a:xfrm>
+            <a:off x="11360865" y="14547820"/>
+            <a:ext cx="1002174" cy="369332"/>
+          </a:xfrm>
+          <a:prstGeom prst="rect">
+            <a:avLst/>
+          </a:prstGeom>
+          <a:noFill/>
+        </p:spPr>
+        <p:txBody>
+          <a:bodyPr wrap="square" rtlCol="0">
+            <a:spAutoFit/>
+          </a:bodyPr>
+          <a:lstStyle/>
+          <a:p>
+            <a:r>
+              <a:rPr lang="en-US" dirty="0">
+                <a:latin typeface="Times New Roman" panose="02020603050405020304" pitchFamily="18" charset="0"/>
+                <a:cs typeface="Times New Roman" panose="02020603050405020304" pitchFamily="18" charset="0"/>
+              </a:rPr>
+              <a:t>Update</a:t>
+            </a:r>
+            <a:endParaRPr lang="sv-SE" sz="1400" dirty="0">
+              <a:latin typeface="Times New Roman" panose="02020603050405020304" pitchFamily="18" charset="0"/>
+              <a:cs typeface="Times New Roman" panose="02020603050405020304" pitchFamily="18" charset="0"/>
+            </a:endParaRPr>
+          </a:p>
+        </p:txBody>
+      </p:sp>
+      <p:sp>
+        <p:nvSpPr>
+          <p:cNvPr id="35" name="Rectangle 34"/>
+          <p:cNvSpPr/>
+          <p:nvPr/>
+        </p:nvSpPr>
+        <p:spPr>
+          <a:xfrm>
+            <a:off x="12432110" y="15584493"/>
+            <a:ext cx="2260282" cy="434191"/>
+          </a:xfrm>
+          <a:prstGeom prst="rect">
+            <a:avLst/>
+          </a:prstGeom>
+          <a:solidFill>
+            <a:srgbClr val="CC0099">
+              <a:alpha val="20000"/>
+            </a:srgbClr>
+          </a:solidFill>
+          <a:ln>
+            <a:solidFill>
+              <a:schemeClr val="tx1"/>
+            </a:solidFill>
+          </a:ln>
+        </p:spPr>
+        <p:style>
+          <a:lnRef idx="2">
+            <a:schemeClr val="accent1">
+              <a:shade val="50000"/>
+            </a:schemeClr>
+          </a:lnRef>
+          <a:fillRef idx="1">
+            <a:schemeClr val="accent1"/>
+          </a:fillRef>
+          <a:effectRef idx="0">
+            <a:schemeClr val="accent1"/>
+          </a:effectRef>
+          <a:fontRef idx="minor">
+            <a:schemeClr val="lt1"/>
+          </a:fontRef>
+        </p:style>
+        <p:txBody>
+          <a:bodyPr rot="0" spcFirstLastPara="0" vertOverflow="overflow" horzOverflow="overflow" vert="horz" wrap="square" lIns="91440" tIns="45720" rIns="91440" bIns="45720" numCol="1" spcCol="0" rtlCol="0" fromWordArt="0" anchor="ctr" anchorCtr="0" forceAA="0" compatLnSpc="1">
+            <a:prstTxWarp prst="textNoShape">
+              <a:avLst/>
+            </a:prstTxWarp>
+            <a:noAutofit/>
+          </a:bodyPr>
+          <a:lstStyle/>
+          <a:p>
+            <a:pPr algn="ctr"/>
+            <a:r>
+              <a:rPr lang="en-US" sz="2372" dirty="0">
+                <a:solidFill>
+                  <a:schemeClr val="tx1"/>
+                </a:solidFill>
+                <a:latin typeface="Times New Roman" panose="02020603050405020304" pitchFamily="18" charset="0"/>
+                <a:cs typeface="Times New Roman" panose="02020603050405020304" pitchFamily="18" charset="0"/>
+              </a:rPr>
+              <a:t>Loss Model</a:t>
+            </a:r>
+          </a:p>
+        </p:txBody>
+      </p:sp>
+      <p:cxnSp>
+        <p:nvCxnSpPr>
+          <p:cNvPr id="36" name="Straight Arrow Connector 35"/>
+          <p:cNvCxnSpPr>
+            <a:stCxn id="31" idx="2"/>
+            <a:endCxn id="35" idx="0"/>
+          </p:cNvCxnSpPr>
+          <p:nvPr/>
+        </p:nvCxnSpPr>
+        <p:spPr>
+          <a:xfrm flipH="1">
+            <a:off x="13562248" y="15183581"/>
+            <a:ext cx="3016" cy="400910"/>
+          </a:xfrm>
+          <a:prstGeom prst="straightConnector1">
+            <a:avLst/>
+          </a:prstGeom>
+          <a:ln w="12700">
+            <a:solidFill>
+              <a:schemeClr val="tx1"/>
+            </a:solidFill>
+            <a:tailEnd type="triangle"/>
+          </a:ln>
+        </p:spPr>
+        <p:style>
+          <a:lnRef idx="1">
+            <a:schemeClr val="accent1"/>
+          </a:lnRef>
+          <a:fillRef idx="0">
+            <a:schemeClr val="accent1"/>
+          </a:fillRef>
+          <a:effectRef idx="0">
+            <a:schemeClr val="accent1"/>
+          </a:effectRef>
+          <a:fontRef idx="minor">
+            <a:schemeClr val="tx1"/>
+          </a:fontRef>
+        </p:style>
+      </p:cxnSp>
+      <p:cxnSp>
+        <p:nvCxnSpPr>
+          <p:cNvPr id="37" name="Straight Arrow Connector 36"/>
+          <p:cNvCxnSpPr>
+            <a:stCxn id="35" idx="2"/>
+            <a:endCxn id="38" idx="0"/>
+          </p:cNvCxnSpPr>
+          <p:nvPr/>
+        </p:nvCxnSpPr>
+        <p:spPr>
+          <a:xfrm flipH="1">
+            <a:off x="13559217" y="16018684"/>
+            <a:ext cx="3032" cy="334967"/>
+          </a:xfrm>
+          <a:prstGeom prst="straightConnector1">
+            <a:avLst/>
+          </a:prstGeom>
+          <a:ln w="12700">
+            <a:solidFill>
+              <a:schemeClr val="tx1"/>
+            </a:solidFill>
+            <a:tailEnd type="triangle"/>
+          </a:ln>
+        </p:spPr>
+        <p:style>
+          <a:lnRef idx="1">
+            <a:schemeClr val="accent1"/>
+          </a:lnRef>
+          <a:fillRef idx="0">
+            <a:schemeClr val="accent1"/>
+          </a:fillRef>
+          <a:effectRef idx="0">
+            <a:schemeClr val="accent1"/>
+          </a:effectRef>
+          <a:fontRef idx="minor">
+            <a:schemeClr val="tx1"/>
+          </a:fontRef>
+        </p:style>
+      </p:cxnSp>
+      <p:sp>
+        <p:nvSpPr>
+          <p:cNvPr id="38" name="Rectangle 37"/>
+          <p:cNvSpPr/>
+          <p:nvPr/>
+        </p:nvSpPr>
+        <p:spPr>
+          <a:xfrm>
+            <a:off x="12426046" y="16353651"/>
+            <a:ext cx="2266346" cy="434191"/>
+          </a:xfrm>
+          <a:prstGeom prst="rect">
+            <a:avLst/>
+          </a:prstGeom>
+          <a:solidFill>
+            <a:srgbClr val="CC0099">
+              <a:alpha val="20000"/>
+            </a:srgbClr>
+          </a:solidFill>
+          <a:ln>
+            <a:solidFill>
+              <a:schemeClr val="tx1"/>
+            </a:solidFill>
+          </a:ln>
+        </p:spPr>
+        <p:style>
+          <a:lnRef idx="2">
+            <a:schemeClr val="accent1">
+              <a:shade val="50000"/>
+            </a:schemeClr>
+          </a:lnRef>
+          <a:fillRef idx="1">
+            <a:schemeClr val="accent1"/>
+          </a:fillRef>
+          <a:effectRef idx="0">
+            <a:schemeClr val="accent1"/>
+          </a:effectRef>
+          <a:fontRef idx="minor">
+            <a:schemeClr val="lt1"/>
+          </a:fontRef>
+        </p:style>
+        <p:txBody>
+          <a:bodyPr rot="0" spcFirstLastPara="0" vertOverflow="overflow" horzOverflow="overflow" vert="horz" wrap="square" lIns="91440" tIns="45720" rIns="91440" bIns="45720" numCol="1" spcCol="0" rtlCol="0" fromWordArt="0" anchor="ctr" anchorCtr="0" forceAA="0" compatLnSpc="1">
+            <a:prstTxWarp prst="textNoShape">
+              <a:avLst/>
+            </a:prstTxWarp>
+            <a:noAutofit/>
+          </a:bodyPr>
+          <a:lstStyle/>
+          <a:p>
+            <a:pPr algn="ctr"/>
+            <a:r>
+              <a:rPr lang="en-US" sz="2372" dirty="0">
+                <a:solidFill>
+                  <a:schemeClr val="tx1"/>
+                </a:solidFill>
+                <a:latin typeface="Times New Roman" panose="02020603050405020304" pitchFamily="18" charset="0"/>
+                <a:cs typeface="Times New Roman" panose="02020603050405020304" pitchFamily="18" charset="0"/>
+              </a:rPr>
+              <a:t>Thermal Model</a:t>
+            </a:r>
+          </a:p>
+        </p:txBody>
+      </p:sp>
+      <p:cxnSp>
+        <p:nvCxnSpPr>
+          <p:cNvPr id="39" name="Straight Connector 38"/>
+          <p:cNvCxnSpPr/>
+          <p:nvPr/>
+        </p:nvCxnSpPr>
+        <p:spPr>
+          <a:xfrm>
+            <a:off x="12078813" y="16570741"/>
+            <a:ext cx="357734" cy="0"/>
+          </a:xfrm>
+          <a:prstGeom prst="line">
+            <a:avLst/>
+          </a:prstGeom>
+          <a:ln w="12700">
+            <a:solidFill>
+              <a:schemeClr val="tx1"/>
+            </a:solidFill>
+          </a:ln>
+        </p:spPr>
+        <p:style>
+          <a:lnRef idx="1">
+            <a:schemeClr val="accent1"/>
+          </a:lnRef>
+          <a:fillRef idx="0">
+            <a:schemeClr val="accent1"/>
+          </a:fillRef>
+          <a:effectRef idx="0">
+            <a:schemeClr val="accent1"/>
+          </a:effectRef>
+          <a:fontRef idx="minor">
+            <a:schemeClr val="tx1"/>
+          </a:fontRef>
+        </p:style>
+      </p:cxnSp>
+      <p:cxnSp>
+        <p:nvCxnSpPr>
+          <p:cNvPr id="40" name="Straight Arrow Connector 39"/>
+          <p:cNvCxnSpPr>
+            <a:endCxn id="35" idx="1"/>
+          </p:cNvCxnSpPr>
+          <p:nvPr/>
+        </p:nvCxnSpPr>
+        <p:spPr>
+          <a:xfrm>
+            <a:off x="12068308" y="15801585"/>
+            <a:ext cx="363800" cy="0"/>
+          </a:xfrm>
+          <a:prstGeom prst="straightConnector1">
+            <a:avLst/>
+          </a:prstGeom>
+          <a:ln w="12700">
+            <a:solidFill>
+              <a:schemeClr val="tx1"/>
+            </a:solidFill>
+            <a:tailEnd type="triangle"/>
+          </a:ln>
+        </p:spPr>
+        <p:style>
+          <a:lnRef idx="1">
+            <a:schemeClr val="accent1"/>
+          </a:lnRef>
+          <a:fillRef idx="0">
+            <a:schemeClr val="accent1"/>
+          </a:fillRef>
+          <a:effectRef idx="0">
+            <a:schemeClr val="accent1"/>
+          </a:effectRef>
+          <a:fontRef idx="minor">
+            <a:schemeClr val="tx1"/>
+          </a:fontRef>
+        </p:style>
+      </p:cxnSp>
+      <p:cxnSp>
+        <p:nvCxnSpPr>
+          <p:cNvPr id="41" name="Straight Connector 40"/>
+          <p:cNvCxnSpPr/>
+          <p:nvPr/>
+        </p:nvCxnSpPr>
+        <p:spPr>
+          <a:xfrm>
+            <a:off x="12068304" y="15801590"/>
+            <a:ext cx="0" cy="769156"/>
+          </a:xfrm>
+          <a:prstGeom prst="line">
+            <a:avLst/>
+          </a:prstGeom>
+          <a:ln w="12700">
+            <a:solidFill>
+              <a:schemeClr val="tx1"/>
+            </a:solidFill>
+          </a:ln>
+        </p:spPr>
+        <p:style>
+          <a:lnRef idx="1">
+            <a:schemeClr val="accent1"/>
+          </a:lnRef>
+          <a:fillRef idx="0">
+            <a:schemeClr val="accent1"/>
+          </a:fillRef>
+          <a:effectRef idx="0">
+            <a:schemeClr val="accent1"/>
+          </a:effectRef>
+          <a:fontRef idx="minor">
+            <a:schemeClr val="tx1"/>
+          </a:fontRef>
+        </p:style>
+      </p:cxnSp>
+      <p:sp>
+        <p:nvSpPr>
+          <p:cNvPr id="42" name="TextBox 41"/>
+          <p:cNvSpPr txBox="1"/>
+          <p:nvPr/>
+        </p:nvSpPr>
+        <p:spPr>
+          <a:xfrm>
+            <a:off x="11530289" y="15153173"/>
+            <a:ext cx="1052808" cy="646331"/>
+          </a:xfrm>
+          <a:prstGeom prst="rect">
+            <a:avLst/>
+          </a:prstGeom>
+          <a:noFill/>
+        </p:spPr>
+        <p:txBody>
+          <a:bodyPr wrap="square" rtlCol="0">
+            <a:spAutoFit/>
+          </a:bodyPr>
+          <a:lstStyle/>
+          <a:p>
+            <a:r>
+              <a:rPr lang="en-US" dirty="0">
+                <a:latin typeface="Times New Roman" panose="02020603050405020304" pitchFamily="18" charset="0"/>
+                <a:cs typeface="Times New Roman" panose="02020603050405020304" pitchFamily="18" charset="0"/>
+              </a:rPr>
+              <a:t>Junction Temp</a:t>
+            </a:r>
+            <a:endParaRPr lang="sv-SE" dirty="0">
+              <a:latin typeface="Times New Roman" panose="02020603050405020304" pitchFamily="18" charset="0"/>
+              <a:cs typeface="Times New Roman" panose="02020603050405020304" pitchFamily="18" charset="0"/>
+            </a:endParaRPr>
+          </a:p>
+        </p:txBody>
+      </p:sp>
+      <p:cxnSp>
+        <p:nvCxnSpPr>
+          <p:cNvPr id="43" name="Straight Connector 42"/>
+          <p:cNvCxnSpPr/>
+          <p:nvPr/>
+        </p:nvCxnSpPr>
+        <p:spPr>
+          <a:xfrm flipH="1">
+            <a:off x="11452957" y="16221253"/>
+            <a:ext cx="2068783" cy="244"/>
+          </a:xfrm>
+          <a:prstGeom prst="line">
+            <a:avLst/>
+          </a:prstGeom>
+          <a:ln w="12700">
+            <a:solidFill>
+              <a:schemeClr val="tx1"/>
+            </a:solidFill>
+          </a:ln>
+        </p:spPr>
+        <p:style>
+          <a:lnRef idx="1">
+            <a:schemeClr val="accent1"/>
+          </a:lnRef>
+          <a:fillRef idx="0">
+            <a:schemeClr val="accent1"/>
+          </a:fillRef>
+          <a:effectRef idx="0">
+            <a:schemeClr val="accent1"/>
+          </a:effectRef>
+          <a:fontRef idx="minor">
+            <a:schemeClr val="tx1"/>
+          </a:fontRef>
+        </p:style>
+      </p:cxnSp>
+      <p:cxnSp>
+        <p:nvCxnSpPr>
+          <p:cNvPr id="44" name="Straight Arrow Connector 43"/>
+          <p:cNvCxnSpPr>
+            <a:stCxn id="38" idx="2"/>
+            <a:endCxn id="45" idx="0"/>
+          </p:cNvCxnSpPr>
+          <p:nvPr/>
+        </p:nvCxnSpPr>
+        <p:spPr>
+          <a:xfrm>
+            <a:off x="13559217" y="16787841"/>
+            <a:ext cx="6048" cy="566235"/>
+          </a:xfrm>
+          <a:prstGeom prst="straightConnector1">
+            <a:avLst/>
+          </a:prstGeom>
+          <a:ln w="12700">
+            <a:solidFill>
+              <a:schemeClr val="tx1"/>
+            </a:solidFill>
+            <a:tailEnd type="triangle"/>
+          </a:ln>
+        </p:spPr>
+        <p:style>
+          <a:lnRef idx="1">
+            <a:schemeClr val="accent1"/>
+          </a:lnRef>
+          <a:fillRef idx="0">
+            <a:schemeClr val="accent1"/>
+          </a:fillRef>
+          <a:effectRef idx="0">
+            <a:schemeClr val="accent1"/>
+          </a:effectRef>
+          <a:fontRef idx="minor">
+            <a:schemeClr val="tx1"/>
+          </a:fontRef>
+        </p:style>
+      </p:cxnSp>
+      <p:sp>
+        <p:nvSpPr>
+          <p:cNvPr id="45" name="Rectangle 44"/>
+          <p:cNvSpPr/>
+          <p:nvPr/>
+        </p:nvSpPr>
+        <p:spPr>
+          <a:xfrm>
+            <a:off x="11934413" y="17354073"/>
+            <a:ext cx="3261706" cy="2493070"/>
+          </a:xfrm>
+          <a:prstGeom prst="rect">
+            <a:avLst/>
+          </a:prstGeom>
+          <a:solidFill>
+            <a:srgbClr val="C00000">
+              <a:alpha val="20000"/>
+            </a:srgbClr>
+          </a:solidFill>
+          <a:ln>
+            <a:solidFill>
+              <a:schemeClr val="tx1"/>
+            </a:solidFill>
+          </a:ln>
+        </p:spPr>
+        <p:style>
+          <a:lnRef idx="2">
+            <a:schemeClr val="accent1">
+              <a:shade val="50000"/>
+            </a:schemeClr>
+          </a:lnRef>
+          <a:fillRef idx="1">
+            <a:schemeClr val="accent1"/>
+          </a:fillRef>
+          <a:effectRef idx="0">
+            <a:schemeClr val="accent1"/>
+          </a:effectRef>
+          <a:fontRef idx="minor">
+            <a:schemeClr val="lt1"/>
+          </a:fontRef>
+        </p:style>
+        <p:txBody>
+          <a:bodyPr rot="0" spcFirstLastPara="0" vertOverflow="overflow" horzOverflow="overflow" vert="horz" wrap="square" lIns="91440" tIns="45720" rIns="91440" bIns="45720" numCol="1" spcCol="0" rtlCol="0" fromWordArt="0" anchor="ctr" anchorCtr="0" forceAA="0" compatLnSpc="1">
+            <a:prstTxWarp prst="textNoShape">
+              <a:avLst/>
+            </a:prstTxWarp>
+            <a:noAutofit/>
+          </a:bodyPr>
+          <a:lstStyle/>
+          <a:p>
+            <a:pPr algn="ctr"/>
+            <a:r>
+              <a:rPr lang="en-US" sz="2372" dirty="0">
+                <a:solidFill>
+                  <a:schemeClr val="tx1"/>
+                </a:solidFill>
+                <a:latin typeface="Times New Roman" panose="02020603050405020304" pitchFamily="18" charset="0"/>
+                <a:cs typeface="Times New Roman" panose="02020603050405020304" pitchFamily="18" charset="0"/>
+              </a:rPr>
+              <a:t>Estimation:</a:t>
+            </a:r>
+          </a:p>
+          <a:p>
+            <a:pPr marL="285726" indent="-285726">
+              <a:buFont typeface="Arial" panose="020B0604020202020204" pitchFamily="34" charset="0"/>
+              <a:buChar char="•"/>
+            </a:pPr>
+            <a:r>
+              <a:rPr lang="en-US" sz="2372" dirty="0">
+                <a:solidFill>
+                  <a:schemeClr val="tx1"/>
+                </a:solidFill>
+                <a:latin typeface="Times New Roman" panose="02020603050405020304" pitchFamily="18" charset="0"/>
+                <a:cs typeface="Times New Roman" panose="02020603050405020304" pitchFamily="18" charset="0"/>
+              </a:rPr>
+              <a:t>Heatsink size/cost</a:t>
+            </a:r>
+          </a:p>
+          <a:p>
+            <a:pPr marL="285726" indent="-285726">
+              <a:buFont typeface="Arial" panose="020B0604020202020204" pitchFamily="34" charset="0"/>
+              <a:buChar char="•"/>
+            </a:pPr>
+            <a:r>
+              <a:rPr lang="en-US" sz="2372" dirty="0">
+                <a:solidFill>
+                  <a:schemeClr val="tx1"/>
+                </a:solidFill>
+                <a:latin typeface="Times New Roman" panose="02020603050405020304" pitchFamily="18" charset="0"/>
+                <a:cs typeface="Times New Roman" panose="02020603050405020304" pitchFamily="18" charset="0"/>
+              </a:rPr>
+              <a:t>Power module size/cost</a:t>
+            </a:r>
+          </a:p>
+          <a:p>
+            <a:pPr marL="285726" indent="-285726">
+              <a:buFont typeface="Arial" panose="020B0604020202020204" pitchFamily="34" charset="0"/>
+              <a:buChar char="•"/>
+            </a:pPr>
+            <a:r>
+              <a:rPr lang="en-US" sz="2372" dirty="0">
+                <a:solidFill>
+                  <a:schemeClr val="tx1"/>
+                </a:solidFill>
+                <a:latin typeface="Times New Roman" panose="02020603050405020304" pitchFamily="18" charset="0"/>
+                <a:cs typeface="Times New Roman" panose="02020603050405020304" pitchFamily="18" charset="0"/>
+              </a:rPr>
+              <a:t>Aux size (e.g. gate driver) size/cost</a:t>
+            </a:r>
+          </a:p>
+          <a:p>
+            <a:pPr algn="ctr"/>
+            <a:endParaRPr lang="en-US" sz="2372" dirty="0">
+              <a:solidFill>
+                <a:schemeClr val="tx1"/>
+              </a:solidFill>
+              <a:latin typeface="Times New Roman" panose="02020603050405020304" pitchFamily="18" charset="0"/>
+              <a:cs typeface="Times New Roman" panose="02020603050405020304" pitchFamily="18" charset="0"/>
+            </a:endParaRPr>
+          </a:p>
+        </p:txBody>
+      </p:sp>
+      <p:cxnSp>
+        <p:nvCxnSpPr>
+          <p:cNvPr id="46" name="Straight Connector 45"/>
+          <p:cNvCxnSpPr/>
+          <p:nvPr/>
+        </p:nvCxnSpPr>
+        <p:spPr>
+          <a:xfrm flipH="1" flipV="1">
+            <a:off x="13515677" y="16211956"/>
+            <a:ext cx="2202445" cy="4946"/>
+          </a:xfrm>
+          <a:prstGeom prst="line">
+            <a:avLst/>
+          </a:prstGeom>
+          <a:ln w="12700">
+            <a:solidFill>
+              <a:schemeClr val="tx1"/>
+            </a:solidFill>
+          </a:ln>
+        </p:spPr>
+        <p:style>
+          <a:lnRef idx="1">
+            <a:schemeClr val="accent1"/>
+          </a:lnRef>
+          <a:fillRef idx="0">
+            <a:schemeClr val="accent1"/>
+          </a:fillRef>
+          <a:effectRef idx="0">
+            <a:schemeClr val="accent1"/>
+          </a:effectRef>
+          <a:fontRef idx="minor">
+            <a:schemeClr val="tx1"/>
+          </a:fontRef>
+        </p:style>
+      </p:cxnSp>
+      <p:cxnSp>
+        <p:nvCxnSpPr>
+          <p:cNvPr id="47" name="Straight Arrow Connector 46"/>
+          <p:cNvCxnSpPr/>
+          <p:nvPr/>
+        </p:nvCxnSpPr>
+        <p:spPr>
+          <a:xfrm>
+            <a:off x="15718118" y="16221256"/>
+            <a:ext cx="4634" cy="5324809"/>
+          </a:xfrm>
+          <a:prstGeom prst="straightConnector1">
+            <a:avLst/>
+          </a:prstGeom>
+          <a:ln w="12700">
+            <a:solidFill>
+              <a:schemeClr val="tx1"/>
+            </a:solidFill>
+            <a:tailEnd type="triangle"/>
+          </a:ln>
+        </p:spPr>
+        <p:style>
+          <a:lnRef idx="1">
+            <a:schemeClr val="accent1"/>
+          </a:lnRef>
+          <a:fillRef idx="0">
+            <a:schemeClr val="accent1"/>
+          </a:fillRef>
+          <a:effectRef idx="0">
+            <a:schemeClr val="accent1"/>
+          </a:effectRef>
+          <a:fontRef idx="minor">
+            <a:schemeClr val="tx1"/>
+          </a:fontRef>
+        </p:style>
+      </p:cxnSp>
+      <p:cxnSp>
+        <p:nvCxnSpPr>
+          <p:cNvPr id="48" name="Straight Arrow Connector 47"/>
+          <p:cNvCxnSpPr/>
+          <p:nvPr/>
+        </p:nvCxnSpPr>
+        <p:spPr>
+          <a:xfrm>
+            <a:off x="12113130" y="19854859"/>
+            <a:ext cx="8496" cy="1691207"/>
+          </a:xfrm>
+          <a:prstGeom prst="straightConnector1">
+            <a:avLst/>
+          </a:prstGeom>
+          <a:ln w="12700">
+            <a:solidFill>
+              <a:schemeClr val="tx1"/>
+            </a:solidFill>
+            <a:tailEnd type="triangle"/>
+          </a:ln>
+        </p:spPr>
+        <p:style>
+          <a:lnRef idx="1">
+            <a:schemeClr val="accent1"/>
+          </a:lnRef>
+          <a:fillRef idx="0">
+            <a:schemeClr val="accent1"/>
+          </a:fillRef>
+          <a:effectRef idx="0">
+            <a:schemeClr val="accent1"/>
+          </a:effectRef>
+          <a:fontRef idx="minor">
+            <a:schemeClr val="tx1"/>
+          </a:fontRef>
+        </p:style>
+      </p:cxnSp>
+      <p:cxnSp>
+        <p:nvCxnSpPr>
+          <p:cNvPr id="49" name="Straight Arrow Connector 48"/>
+          <p:cNvCxnSpPr/>
+          <p:nvPr/>
+        </p:nvCxnSpPr>
+        <p:spPr>
+          <a:xfrm>
+            <a:off x="14817298" y="19826013"/>
+            <a:ext cx="23075" cy="1720050"/>
+          </a:xfrm>
+          <a:prstGeom prst="straightConnector1">
+            <a:avLst/>
+          </a:prstGeom>
+          <a:ln w="12700">
+            <a:solidFill>
+              <a:schemeClr val="tx1"/>
+            </a:solidFill>
+            <a:tailEnd type="triangle"/>
+          </a:ln>
+        </p:spPr>
+        <p:style>
+          <a:lnRef idx="1">
+            <a:schemeClr val="accent1"/>
+          </a:lnRef>
+          <a:fillRef idx="0">
+            <a:schemeClr val="accent1"/>
+          </a:fillRef>
+          <a:effectRef idx="0">
+            <a:schemeClr val="accent1"/>
+          </a:effectRef>
+          <a:fontRef idx="minor">
+            <a:schemeClr val="tx1"/>
+          </a:fontRef>
+        </p:style>
+      </p:cxnSp>
+      <p:sp>
+        <p:nvSpPr>
+          <p:cNvPr id="50" name="TextBox 49"/>
+          <p:cNvSpPr txBox="1"/>
+          <p:nvPr/>
+        </p:nvSpPr>
+        <p:spPr>
+          <a:xfrm>
+            <a:off x="10614450" y="20072828"/>
+            <a:ext cx="1575729" cy="1323439"/>
+          </a:xfrm>
+          <a:prstGeom prst="rect">
+            <a:avLst/>
+          </a:prstGeom>
+          <a:noFill/>
+        </p:spPr>
+        <p:txBody>
+          <a:bodyPr wrap="square" rtlCol="0">
+            <a:spAutoFit/>
+          </a:bodyPr>
+          <a:lstStyle/>
+          <a:p>
+            <a:r>
+              <a:rPr lang="en-US" sz="2000" dirty="0">
+                <a:latin typeface="Times New Roman" panose="02020603050405020304" pitchFamily="18" charset="0"/>
+                <a:cs typeface="Times New Roman" panose="02020603050405020304" pitchFamily="18" charset="0"/>
+              </a:rPr>
+              <a:t>Size </a:t>
+            </a:r>
+          </a:p>
+          <a:p>
+            <a:pPr marL="285726" indent="-285726">
+              <a:buFont typeface="Arial" panose="020B0604020202020204" pitchFamily="34" charset="0"/>
+              <a:buChar char="•"/>
+            </a:pPr>
+            <a:r>
+              <a:rPr lang="en-US" sz="2000" dirty="0">
+                <a:latin typeface="Times New Roman" panose="02020603050405020304" pitchFamily="18" charset="0"/>
+                <a:cs typeface="Times New Roman" panose="02020603050405020304" pitchFamily="18" charset="0"/>
+              </a:rPr>
+              <a:t>Heatsink</a:t>
+            </a:r>
+          </a:p>
+          <a:p>
+            <a:pPr marL="285726" indent="-285726">
+              <a:buFont typeface="Arial" panose="020B0604020202020204" pitchFamily="34" charset="0"/>
+              <a:buChar char="•"/>
+            </a:pPr>
+            <a:r>
+              <a:rPr lang="en-US" sz="2000" dirty="0">
+                <a:latin typeface="Times New Roman" panose="02020603050405020304" pitchFamily="18" charset="0"/>
+                <a:cs typeface="Times New Roman" panose="02020603050405020304" pitchFamily="18" charset="0"/>
+              </a:rPr>
+              <a:t>Module</a:t>
+            </a:r>
+          </a:p>
+          <a:p>
+            <a:pPr marL="285726" indent="-285726">
+              <a:buFont typeface="Arial" panose="020B0604020202020204" pitchFamily="34" charset="0"/>
+              <a:buChar char="•"/>
+            </a:pPr>
+            <a:r>
+              <a:rPr lang="en-US" sz="2000" dirty="0">
+                <a:latin typeface="Times New Roman" panose="02020603050405020304" pitchFamily="18" charset="0"/>
+                <a:cs typeface="Times New Roman" panose="02020603050405020304" pitchFamily="18" charset="0"/>
+              </a:rPr>
+              <a:t>Aux</a:t>
+            </a:r>
+            <a:endParaRPr lang="sv-SE" sz="2000" dirty="0">
+              <a:latin typeface="Times New Roman" panose="02020603050405020304" pitchFamily="18" charset="0"/>
+              <a:cs typeface="Times New Roman" panose="02020603050405020304" pitchFamily="18" charset="0"/>
+            </a:endParaRPr>
+          </a:p>
+        </p:txBody>
+      </p:sp>
+      <p:sp>
+        <p:nvSpPr>
+          <p:cNvPr id="51" name="TextBox 50"/>
+          <p:cNvSpPr txBox="1"/>
+          <p:nvPr/>
+        </p:nvSpPr>
+        <p:spPr>
+          <a:xfrm>
+            <a:off x="13379228" y="19985784"/>
+            <a:ext cx="1437119" cy="1323439"/>
+          </a:xfrm>
+          <a:prstGeom prst="rect">
+            <a:avLst/>
+          </a:prstGeom>
+          <a:noFill/>
+        </p:spPr>
+        <p:txBody>
+          <a:bodyPr wrap="square" rtlCol="0">
+            <a:spAutoFit/>
+          </a:bodyPr>
+          <a:lstStyle/>
+          <a:p>
+            <a:r>
+              <a:rPr lang="en-US" sz="2000" dirty="0">
+                <a:latin typeface="Times New Roman" panose="02020603050405020304" pitchFamily="18" charset="0"/>
+                <a:cs typeface="Times New Roman" panose="02020603050405020304" pitchFamily="18" charset="0"/>
+              </a:rPr>
+              <a:t>Cost</a:t>
+            </a:r>
+          </a:p>
+          <a:p>
+            <a:pPr marL="285726" indent="-285726">
+              <a:buFont typeface="Arial" panose="020B0604020202020204" pitchFamily="34" charset="0"/>
+              <a:buChar char="•"/>
+            </a:pPr>
+            <a:r>
+              <a:rPr lang="en-US" sz="2000" dirty="0">
+                <a:latin typeface="Times New Roman" panose="02020603050405020304" pitchFamily="18" charset="0"/>
+                <a:cs typeface="Times New Roman" panose="02020603050405020304" pitchFamily="18" charset="0"/>
+              </a:rPr>
+              <a:t>Heatsink</a:t>
+            </a:r>
+          </a:p>
+          <a:p>
+            <a:pPr marL="285726" indent="-285726">
+              <a:buFont typeface="Arial" panose="020B0604020202020204" pitchFamily="34" charset="0"/>
+              <a:buChar char="•"/>
+            </a:pPr>
+            <a:r>
+              <a:rPr lang="en-US" sz="2000" dirty="0">
+                <a:latin typeface="Times New Roman" panose="02020603050405020304" pitchFamily="18" charset="0"/>
+                <a:cs typeface="Times New Roman" panose="02020603050405020304" pitchFamily="18" charset="0"/>
+              </a:rPr>
+              <a:t>Module</a:t>
+            </a:r>
+          </a:p>
+          <a:p>
+            <a:pPr marL="285726" indent="-285726">
+              <a:buFont typeface="Arial" panose="020B0604020202020204" pitchFamily="34" charset="0"/>
+              <a:buChar char="•"/>
+            </a:pPr>
+            <a:r>
+              <a:rPr lang="en-US" sz="2000" dirty="0">
+                <a:latin typeface="Times New Roman" panose="02020603050405020304" pitchFamily="18" charset="0"/>
+                <a:cs typeface="Times New Roman" panose="02020603050405020304" pitchFamily="18" charset="0"/>
+              </a:rPr>
+              <a:t>Aux</a:t>
+            </a:r>
+            <a:endParaRPr lang="sv-SE" sz="2000" dirty="0">
+              <a:latin typeface="Times New Roman" panose="02020603050405020304" pitchFamily="18" charset="0"/>
+              <a:cs typeface="Times New Roman" panose="02020603050405020304" pitchFamily="18" charset="0"/>
+            </a:endParaRPr>
+          </a:p>
+        </p:txBody>
+      </p:sp>
+      <p:sp>
+        <p:nvSpPr>
+          <p:cNvPr id="52" name="TextBox 51"/>
+          <p:cNvSpPr txBox="1"/>
+          <p:nvPr/>
+        </p:nvSpPr>
+        <p:spPr>
+          <a:xfrm>
+            <a:off x="15723707" y="17922481"/>
+            <a:ext cx="2151899" cy="707886"/>
+          </a:xfrm>
+          <a:prstGeom prst="rect">
+            <a:avLst/>
+          </a:prstGeom>
+          <a:noFill/>
+        </p:spPr>
+        <p:txBody>
+          <a:bodyPr wrap="square" rtlCol="0">
+            <a:spAutoFit/>
+          </a:bodyPr>
+          <a:lstStyle/>
+          <a:p>
+            <a:r>
+              <a:rPr lang="en-US" sz="2000" dirty="0">
+                <a:latin typeface="Times New Roman" panose="02020603050405020304" pitchFamily="18" charset="0"/>
+                <a:cs typeface="Times New Roman" panose="02020603050405020304" pitchFamily="18" charset="0"/>
+              </a:rPr>
+              <a:t>Semiconductor Loss</a:t>
+            </a:r>
+            <a:endParaRPr lang="sv-SE" sz="2000" dirty="0">
+              <a:latin typeface="Times New Roman" panose="02020603050405020304" pitchFamily="18" charset="0"/>
+              <a:cs typeface="Times New Roman" panose="02020603050405020304" pitchFamily="18" charset="0"/>
+            </a:endParaRPr>
+          </a:p>
+        </p:txBody>
+      </p:sp>
+      <p:sp>
+        <p:nvSpPr>
+          <p:cNvPr id="53" name="Rectangle 52"/>
+          <p:cNvSpPr/>
+          <p:nvPr/>
+        </p:nvSpPr>
+        <p:spPr>
+          <a:xfrm>
+            <a:off x="15903237" y="12855586"/>
+            <a:ext cx="2191385" cy="873537"/>
+          </a:xfrm>
+          <a:prstGeom prst="rect">
+            <a:avLst/>
+          </a:prstGeom>
+          <a:noFill/>
+          <a:ln>
+            <a:solidFill>
+              <a:schemeClr val="tx1"/>
+            </a:solidFill>
+          </a:ln>
+        </p:spPr>
+        <p:style>
+          <a:lnRef idx="2">
+            <a:schemeClr val="accent1">
+              <a:shade val="50000"/>
+            </a:schemeClr>
+          </a:lnRef>
+          <a:fillRef idx="1">
+            <a:schemeClr val="accent1"/>
+          </a:fillRef>
+          <a:effectRef idx="0">
+            <a:schemeClr val="accent1"/>
+          </a:effectRef>
+          <a:fontRef idx="minor">
+            <a:schemeClr val="lt1"/>
+          </a:fontRef>
+        </p:style>
+        <p:txBody>
+          <a:bodyPr rot="0" spcFirstLastPara="0" vertOverflow="overflow" horzOverflow="overflow" vert="horz" wrap="square" lIns="91440" tIns="45720" rIns="91440" bIns="45720" numCol="1" spcCol="0" rtlCol="0" fromWordArt="0" anchor="ctr" anchorCtr="0" forceAA="0" compatLnSpc="1">
+            <a:prstTxWarp prst="textNoShape">
+              <a:avLst/>
+            </a:prstTxWarp>
+            <a:noAutofit/>
+          </a:bodyPr>
+          <a:lstStyle/>
+          <a:p>
+            <a:pPr algn="ctr"/>
+            <a:r>
+              <a:rPr lang="en-US" sz="2372" dirty="0">
+                <a:solidFill>
+                  <a:schemeClr val="tx1"/>
+                </a:solidFill>
+                <a:latin typeface="Times New Roman" panose="02020603050405020304" pitchFamily="18" charset="0"/>
+                <a:cs typeface="Times New Roman" panose="02020603050405020304" pitchFamily="18" charset="0"/>
+              </a:rPr>
+              <a:t>dv/</a:t>
+            </a:r>
+            <a:r>
+              <a:rPr lang="en-US" sz="2372" dirty="0" err="1">
+                <a:solidFill>
+                  <a:schemeClr val="tx1"/>
+                </a:solidFill>
+                <a:latin typeface="Times New Roman" panose="02020603050405020304" pitchFamily="18" charset="0"/>
+                <a:cs typeface="Times New Roman" panose="02020603050405020304" pitchFamily="18" charset="0"/>
+              </a:rPr>
+              <a:t>dt</a:t>
+            </a:r>
+            <a:r>
+              <a:rPr lang="en-US" sz="2372" dirty="0">
+                <a:solidFill>
+                  <a:schemeClr val="tx1"/>
+                </a:solidFill>
+                <a:latin typeface="Times New Roman" panose="02020603050405020304" pitchFamily="18" charset="0"/>
+                <a:cs typeface="Times New Roman" panose="02020603050405020304" pitchFamily="18" charset="0"/>
+              </a:rPr>
+              <a:t> limitations</a:t>
+            </a:r>
+          </a:p>
+        </p:txBody>
+      </p:sp>
+      <p:cxnSp>
+        <p:nvCxnSpPr>
+          <p:cNvPr id="54" name="Straight Arrow Connector 53"/>
+          <p:cNvCxnSpPr/>
+          <p:nvPr/>
+        </p:nvCxnSpPr>
+        <p:spPr>
+          <a:xfrm flipH="1">
+            <a:off x="14692392" y="15799504"/>
+            <a:ext cx="2306534" cy="0"/>
+          </a:xfrm>
+          <a:prstGeom prst="straightConnector1">
+            <a:avLst/>
+          </a:prstGeom>
+          <a:ln w="12700">
+            <a:solidFill>
+              <a:schemeClr val="tx1"/>
+            </a:solidFill>
+            <a:tailEnd type="triangle"/>
+          </a:ln>
+        </p:spPr>
+        <p:style>
+          <a:lnRef idx="1">
+            <a:schemeClr val="accent1"/>
+          </a:lnRef>
+          <a:fillRef idx="0">
+            <a:schemeClr val="accent1"/>
+          </a:fillRef>
+          <a:effectRef idx="0">
+            <a:schemeClr val="accent1"/>
+          </a:effectRef>
+          <a:fontRef idx="minor">
+            <a:schemeClr val="tx1"/>
+          </a:fontRef>
+        </p:style>
+      </p:cxnSp>
+      <p:cxnSp>
+        <p:nvCxnSpPr>
+          <p:cNvPr id="55" name="Straight Arrow Connector 54"/>
+          <p:cNvCxnSpPr>
+            <a:endCxn id="53" idx="0"/>
+          </p:cNvCxnSpPr>
+          <p:nvPr/>
+        </p:nvCxnSpPr>
+        <p:spPr>
+          <a:xfrm flipH="1">
+            <a:off x="16998926" y="12413709"/>
+            <a:ext cx="7178" cy="441877"/>
+          </a:xfrm>
+          <a:prstGeom prst="straightConnector1">
+            <a:avLst/>
+          </a:prstGeom>
+          <a:ln w="12700">
+            <a:solidFill>
+              <a:schemeClr val="tx1"/>
+            </a:solidFill>
+            <a:tailEnd type="triangle"/>
+          </a:ln>
+        </p:spPr>
+        <p:style>
+          <a:lnRef idx="1">
+            <a:schemeClr val="accent1"/>
+          </a:lnRef>
+          <a:fillRef idx="0">
+            <a:schemeClr val="accent1"/>
+          </a:fillRef>
+          <a:effectRef idx="0">
+            <a:schemeClr val="accent1"/>
+          </a:effectRef>
+          <a:fontRef idx="minor">
+            <a:schemeClr val="tx1"/>
+          </a:fontRef>
+        </p:style>
+      </p:cxnSp>
+      <p:cxnSp>
+        <p:nvCxnSpPr>
+          <p:cNvPr id="56" name="Straight Connector 55"/>
+          <p:cNvCxnSpPr>
+            <a:stCxn id="53" idx="2"/>
+          </p:cNvCxnSpPr>
+          <p:nvPr/>
+        </p:nvCxnSpPr>
+        <p:spPr>
+          <a:xfrm flipH="1">
+            <a:off x="16998926" y="13729123"/>
+            <a:ext cx="4" cy="2122976"/>
+          </a:xfrm>
+          <a:prstGeom prst="line">
+            <a:avLst/>
+          </a:prstGeom>
+          <a:ln w="12700">
+            <a:solidFill>
+              <a:schemeClr val="tx1"/>
+            </a:solidFill>
+          </a:ln>
+        </p:spPr>
+        <p:style>
+          <a:lnRef idx="1">
+            <a:schemeClr val="accent1"/>
+          </a:lnRef>
+          <a:fillRef idx="0">
+            <a:schemeClr val="accent1"/>
+          </a:fillRef>
+          <a:effectRef idx="0">
+            <a:schemeClr val="accent1"/>
+          </a:effectRef>
+          <a:fontRef idx="minor">
+            <a:schemeClr val="tx1"/>
+          </a:fontRef>
+        </p:style>
+      </p:cxnSp>
+      <p:cxnSp>
+        <p:nvCxnSpPr>
+          <p:cNvPr id="57" name="Straight Arrow Connector 56"/>
+          <p:cNvCxnSpPr/>
+          <p:nvPr/>
+        </p:nvCxnSpPr>
+        <p:spPr>
+          <a:xfrm>
+            <a:off x="19840311" y="12413336"/>
+            <a:ext cx="2" cy="473935"/>
+          </a:xfrm>
+          <a:prstGeom prst="straightConnector1">
+            <a:avLst/>
+          </a:prstGeom>
+          <a:ln w="12700">
+            <a:solidFill>
+              <a:schemeClr val="tx1"/>
+            </a:solidFill>
+            <a:tailEnd type="triangle"/>
+          </a:ln>
+        </p:spPr>
+        <p:style>
+          <a:lnRef idx="1">
+            <a:schemeClr val="accent1"/>
+          </a:lnRef>
+          <a:fillRef idx="0">
+            <a:schemeClr val="accent1"/>
+          </a:fillRef>
+          <a:effectRef idx="0">
+            <a:schemeClr val="accent1"/>
+          </a:effectRef>
+          <a:fontRef idx="minor">
+            <a:schemeClr val="tx1"/>
+          </a:fontRef>
+        </p:style>
+      </p:cxnSp>
+      <p:sp>
+        <p:nvSpPr>
+          <p:cNvPr id="58" name="Rectangle 57"/>
+          <p:cNvSpPr/>
+          <p:nvPr/>
+        </p:nvSpPr>
+        <p:spPr>
+          <a:xfrm>
+            <a:off x="18645437" y="12874706"/>
+            <a:ext cx="2191385" cy="434191"/>
+          </a:xfrm>
+          <a:prstGeom prst="rect">
+            <a:avLst/>
+          </a:prstGeom>
+          <a:noFill/>
+          <a:ln>
+            <a:solidFill>
+              <a:schemeClr val="tx1"/>
+            </a:solidFill>
+          </a:ln>
+        </p:spPr>
+        <p:style>
+          <a:lnRef idx="2">
+            <a:schemeClr val="accent1">
+              <a:shade val="50000"/>
+            </a:schemeClr>
+          </a:lnRef>
+          <a:fillRef idx="1">
+            <a:schemeClr val="accent1"/>
+          </a:fillRef>
+          <a:effectRef idx="0">
+            <a:schemeClr val="accent1"/>
+          </a:effectRef>
+          <a:fontRef idx="minor">
+            <a:schemeClr val="lt1"/>
+          </a:fontRef>
+        </p:style>
+        <p:txBody>
+          <a:bodyPr rot="0" spcFirstLastPara="0" vertOverflow="overflow" horzOverflow="overflow" vert="horz" wrap="square" lIns="91440" tIns="45720" rIns="91440" bIns="45720" numCol="1" spcCol="0" rtlCol="0" fromWordArt="0" anchor="ctr" anchorCtr="0" forceAA="0" compatLnSpc="1">
+            <a:prstTxWarp prst="textNoShape">
+              <a:avLst/>
+            </a:prstTxWarp>
+            <a:noAutofit/>
+          </a:bodyPr>
+          <a:lstStyle/>
+          <a:p>
+            <a:pPr algn="ctr"/>
+            <a:r>
+              <a:rPr lang="en-US" sz="2372" dirty="0">
+                <a:solidFill>
+                  <a:schemeClr val="tx1"/>
+                </a:solidFill>
+                <a:latin typeface="Times New Roman" panose="02020603050405020304" pitchFamily="18" charset="0"/>
+                <a:cs typeface="Times New Roman" panose="02020603050405020304" pitchFamily="18" charset="0"/>
+              </a:rPr>
+              <a:t>Motor Losses</a:t>
+            </a:r>
+          </a:p>
+        </p:txBody>
+      </p:sp>
+      <p:cxnSp>
+        <p:nvCxnSpPr>
+          <p:cNvPr id="59" name="Straight Arrow Connector 58"/>
+          <p:cNvCxnSpPr/>
+          <p:nvPr/>
+        </p:nvCxnSpPr>
+        <p:spPr>
+          <a:xfrm>
+            <a:off x="19840311" y="13296329"/>
+            <a:ext cx="2" cy="473935"/>
+          </a:xfrm>
+          <a:prstGeom prst="straightConnector1">
+            <a:avLst/>
+          </a:prstGeom>
+          <a:ln w="12700">
+            <a:solidFill>
+              <a:schemeClr val="tx1"/>
+            </a:solidFill>
+            <a:tailEnd type="triangle"/>
+          </a:ln>
+        </p:spPr>
+        <p:style>
+          <a:lnRef idx="1">
+            <a:schemeClr val="accent1"/>
+          </a:lnRef>
+          <a:fillRef idx="0">
+            <a:schemeClr val="accent1"/>
+          </a:fillRef>
+          <a:effectRef idx="0">
+            <a:schemeClr val="accent1"/>
+          </a:effectRef>
+          <a:fontRef idx="minor">
+            <a:schemeClr val="tx1"/>
+          </a:fontRef>
+        </p:style>
+      </p:cxnSp>
+      <p:sp>
+        <p:nvSpPr>
+          <p:cNvPr id="60" name="Rectangle 59"/>
+          <p:cNvSpPr/>
+          <p:nvPr/>
+        </p:nvSpPr>
+        <p:spPr>
+          <a:xfrm>
+            <a:off x="18703220" y="13780534"/>
+            <a:ext cx="2191385" cy="643548"/>
+          </a:xfrm>
+          <a:prstGeom prst="rect">
+            <a:avLst/>
+          </a:prstGeom>
+          <a:solidFill>
+            <a:srgbClr val="CC0000">
+              <a:alpha val="20000"/>
+            </a:srgbClr>
+          </a:solidFill>
+          <a:ln>
+            <a:solidFill>
+              <a:schemeClr val="tx1"/>
+            </a:solidFill>
+          </a:ln>
+        </p:spPr>
+        <p:style>
+          <a:lnRef idx="2">
+            <a:schemeClr val="accent1">
+              <a:shade val="50000"/>
+            </a:schemeClr>
+          </a:lnRef>
+          <a:fillRef idx="1">
+            <a:schemeClr val="accent1"/>
+          </a:fillRef>
+          <a:effectRef idx="0">
+            <a:schemeClr val="accent1"/>
+          </a:effectRef>
+          <a:fontRef idx="minor">
+            <a:schemeClr val="lt1"/>
+          </a:fontRef>
+        </p:style>
+        <p:txBody>
+          <a:bodyPr rot="0" spcFirstLastPara="0" vertOverflow="overflow" horzOverflow="overflow" vert="horz" wrap="square" lIns="91440" tIns="45720" rIns="91440" bIns="45720" numCol="1" spcCol="0" rtlCol="0" fromWordArt="0" anchor="ctr" anchorCtr="0" forceAA="0" compatLnSpc="1">
+            <a:prstTxWarp prst="textNoShape">
+              <a:avLst/>
+            </a:prstTxWarp>
+            <a:noAutofit/>
+          </a:bodyPr>
+          <a:lstStyle/>
+          <a:p>
+            <a:pPr algn="ctr"/>
+            <a:r>
+              <a:rPr lang="en-US" sz="2372" dirty="0">
+                <a:solidFill>
+                  <a:schemeClr val="tx1"/>
+                </a:solidFill>
+                <a:latin typeface="Times New Roman" panose="02020603050405020304" pitchFamily="18" charset="0"/>
+                <a:cs typeface="Times New Roman" panose="02020603050405020304" pitchFamily="18" charset="0"/>
+              </a:rPr>
+              <a:t>Harmonic Loss Modelling</a:t>
+            </a:r>
+          </a:p>
+        </p:txBody>
+      </p:sp>
+      <p:cxnSp>
+        <p:nvCxnSpPr>
+          <p:cNvPr id="61" name="Straight Arrow Connector 60"/>
+          <p:cNvCxnSpPr/>
+          <p:nvPr/>
+        </p:nvCxnSpPr>
+        <p:spPr>
+          <a:xfrm flipH="1">
+            <a:off x="19798909" y="14423880"/>
+            <a:ext cx="36364" cy="7163324"/>
+          </a:xfrm>
+          <a:prstGeom prst="straightConnector1">
+            <a:avLst/>
+          </a:prstGeom>
+          <a:ln w="12700">
+            <a:solidFill>
+              <a:schemeClr val="tx1"/>
+            </a:solidFill>
+            <a:tailEnd type="triangle"/>
+          </a:ln>
+        </p:spPr>
+        <p:style>
+          <a:lnRef idx="1">
+            <a:schemeClr val="accent1"/>
+          </a:lnRef>
+          <a:fillRef idx="0">
+            <a:schemeClr val="accent1"/>
+          </a:fillRef>
+          <a:effectRef idx="0">
+            <a:schemeClr val="accent1"/>
+          </a:effectRef>
+          <a:fontRef idx="minor">
+            <a:schemeClr val="tx1"/>
+          </a:fontRef>
+        </p:style>
+      </p:cxnSp>
+      <p:sp>
+        <p:nvSpPr>
+          <p:cNvPr id="62" name="TextBox 61"/>
+          <p:cNvSpPr txBox="1"/>
+          <p:nvPr/>
+        </p:nvSpPr>
+        <p:spPr>
+          <a:xfrm>
+            <a:off x="19870189" y="17276153"/>
+            <a:ext cx="1551326" cy="1015663"/>
+          </a:xfrm>
+          <a:prstGeom prst="rect">
+            <a:avLst/>
+          </a:prstGeom>
+          <a:noFill/>
+        </p:spPr>
+        <p:txBody>
+          <a:bodyPr wrap="square" rtlCol="0">
+            <a:spAutoFit/>
+          </a:bodyPr>
+          <a:lstStyle/>
+          <a:p>
+            <a:r>
+              <a:rPr lang="en-US" sz="2000" dirty="0">
+                <a:latin typeface="Times New Roman" panose="02020603050405020304" pitchFamily="18" charset="0"/>
+                <a:cs typeface="Times New Roman" panose="02020603050405020304" pitchFamily="18" charset="0"/>
+              </a:rPr>
+              <a:t>Motor Harmonic Loss</a:t>
+            </a:r>
+            <a:endParaRPr lang="sv-SE" sz="2000" dirty="0">
+              <a:latin typeface="Times New Roman" panose="02020603050405020304" pitchFamily="18" charset="0"/>
+              <a:cs typeface="Times New Roman" panose="02020603050405020304" pitchFamily="18" charset="0"/>
+            </a:endParaRPr>
+          </a:p>
+        </p:txBody>
+      </p:sp>
+      <p:cxnSp>
+        <p:nvCxnSpPr>
+          <p:cNvPr id="63" name="Straight Arrow Connector 62"/>
+          <p:cNvCxnSpPr>
+            <a:endCxn id="14" idx="3"/>
+          </p:cNvCxnSpPr>
+          <p:nvPr/>
+        </p:nvCxnSpPr>
+        <p:spPr>
+          <a:xfrm flipH="1">
+            <a:off x="22537819" y="11700350"/>
+            <a:ext cx="1291652" cy="10956"/>
+          </a:xfrm>
+          <a:prstGeom prst="straightConnector1">
+            <a:avLst/>
+          </a:prstGeom>
+          <a:ln w="12700">
+            <a:solidFill>
+              <a:schemeClr val="tx1"/>
+            </a:solidFill>
+            <a:tailEnd type="triangle"/>
+          </a:ln>
+        </p:spPr>
+        <p:style>
+          <a:lnRef idx="1">
+            <a:schemeClr val="accent1"/>
+          </a:lnRef>
+          <a:fillRef idx="0">
+            <a:schemeClr val="accent1"/>
+          </a:fillRef>
+          <a:effectRef idx="0">
+            <a:schemeClr val="accent1"/>
+          </a:effectRef>
+          <a:fontRef idx="minor">
+            <a:schemeClr val="tx1"/>
+          </a:fontRef>
+        </p:style>
+      </p:cxnSp>
+      <p:cxnSp>
+        <p:nvCxnSpPr>
+          <p:cNvPr id="64" name="Straight Connector 63"/>
+          <p:cNvCxnSpPr/>
+          <p:nvPr/>
+        </p:nvCxnSpPr>
+        <p:spPr>
+          <a:xfrm>
+            <a:off x="23829470" y="11695970"/>
+            <a:ext cx="0" cy="10135611"/>
+          </a:xfrm>
+          <a:prstGeom prst="line">
+            <a:avLst/>
+          </a:prstGeom>
+          <a:ln w="12700">
+            <a:solidFill>
+              <a:schemeClr val="tx1"/>
+            </a:solidFill>
+          </a:ln>
+        </p:spPr>
+        <p:style>
+          <a:lnRef idx="1">
+            <a:schemeClr val="accent1"/>
+          </a:lnRef>
+          <a:fillRef idx="0">
+            <a:schemeClr val="accent1"/>
+          </a:fillRef>
+          <a:effectRef idx="0">
+            <a:schemeClr val="accent1"/>
+          </a:effectRef>
+          <a:fontRef idx="minor">
+            <a:schemeClr val="tx1"/>
+          </a:fontRef>
+        </p:style>
+      </p:cxnSp>
+      <p:cxnSp>
+        <p:nvCxnSpPr>
+          <p:cNvPr id="65" name="Straight Connector 64"/>
+          <p:cNvCxnSpPr/>
+          <p:nvPr/>
+        </p:nvCxnSpPr>
+        <p:spPr>
+          <a:xfrm>
+            <a:off x="21218476" y="21831577"/>
+            <a:ext cx="2610997" cy="1792"/>
+          </a:xfrm>
+          <a:prstGeom prst="line">
+            <a:avLst/>
+          </a:prstGeom>
+          <a:ln w="12700">
+            <a:solidFill>
+              <a:schemeClr val="tx1"/>
+            </a:solidFill>
+          </a:ln>
+        </p:spPr>
+        <p:style>
+          <a:lnRef idx="1">
+            <a:schemeClr val="accent1"/>
+          </a:lnRef>
+          <a:fillRef idx="0">
+            <a:schemeClr val="accent1"/>
+          </a:fillRef>
+          <a:effectRef idx="0">
+            <a:schemeClr val="accent1"/>
+          </a:effectRef>
+          <a:fontRef idx="minor">
+            <a:schemeClr val="tx1"/>
+          </a:fontRef>
+        </p:style>
+      </p:cxnSp>
+      <p:sp>
+        <p:nvSpPr>
+          <p:cNvPr id="66" name="Rectangle 65"/>
+          <p:cNvSpPr/>
+          <p:nvPr/>
+        </p:nvSpPr>
+        <p:spPr>
+          <a:xfrm>
+            <a:off x="11182350" y="22572394"/>
+            <a:ext cx="5410200" cy="1747549"/>
+          </a:xfrm>
+          <a:prstGeom prst="rect">
+            <a:avLst/>
+          </a:prstGeom>
+          <a:noFill/>
+          <a:ln>
+            <a:solidFill>
+              <a:schemeClr val="tx1"/>
+            </a:solidFill>
+          </a:ln>
+        </p:spPr>
+        <p:style>
+          <a:lnRef idx="2">
+            <a:schemeClr val="accent1">
+              <a:shade val="50000"/>
+            </a:schemeClr>
+          </a:lnRef>
+          <a:fillRef idx="1">
+            <a:schemeClr val="accent1"/>
+          </a:fillRef>
+          <a:effectRef idx="0">
+            <a:schemeClr val="accent1"/>
+          </a:effectRef>
+          <a:fontRef idx="minor">
+            <a:schemeClr val="lt1"/>
+          </a:fontRef>
+        </p:style>
+        <p:txBody>
+          <a:bodyPr rot="0" spcFirstLastPara="0" vertOverflow="overflow" horzOverflow="overflow" vert="horz" wrap="square" lIns="91440" tIns="45720" rIns="91440" bIns="45720" numCol="1" spcCol="0" rtlCol="0" fromWordArt="0" anchor="ctr" anchorCtr="0" forceAA="0" compatLnSpc="1">
+            <a:prstTxWarp prst="textNoShape">
+              <a:avLst/>
+            </a:prstTxWarp>
+            <a:noAutofit/>
+          </a:bodyPr>
+          <a:lstStyle/>
+          <a:p>
+            <a:pPr algn="ctr"/>
+            <a:r>
+              <a:rPr lang="en-US" sz="2372" dirty="0">
+                <a:solidFill>
+                  <a:schemeClr val="tx1"/>
+                </a:solidFill>
+                <a:latin typeface="Times New Roman" panose="02020603050405020304" pitchFamily="18" charset="0"/>
+                <a:cs typeface="Times New Roman" panose="02020603050405020304" pitchFamily="18" charset="0"/>
+              </a:rPr>
+              <a:t>Total Converter</a:t>
+            </a:r>
+          </a:p>
+          <a:p>
+            <a:pPr marL="342883" indent="-342883">
+              <a:buFont typeface="Arial" panose="020B0604020202020204" pitchFamily="34" charset="0"/>
+              <a:buChar char="•"/>
+            </a:pPr>
+            <a:r>
+              <a:rPr lang="en-US" sz="2372" dirty="0">
+                <a:solidFill>
+                  <a:schemeClr val="tx1"/>
+                </a:solidFill>
+                <a:latin typeface="Times New Roman" panose="02020603050405020304" pitchFamily="18" charset="0"/>
+                <a:cs typeface="Times New Roman" panose="02020603050405020304" pitchFamily="18" charset="0"/>
+              </a:rPr>
+              <a:t>Loss</a:t>
+            </a:r>
+          </a:p>
+          <a:p>
+            <a:pPr marL="342883" indent="-342883">
+              <a:buFont typeface="Arial" panose="020B0604020202020204" pitchFamily="34" charset="0"/>
+              <a:buChar char="•"/>
+            </a:pPr>
+            <a:r>
+              <a:rPr lang="en-US" sz="2372" dirty="0">
+                <a:solidFill>
+                  <a:schemeClr val="tx1"/>
+                </a:solidFill>
+                <a:latin typeface="Times New Roman" panose="02020603050405020304" pitchFamily="18" charset="0"/>
+                <a:cs typeface="Times New Roman" panose="02020603050405020304" pitchFamily="18" charset="0"/>
+              </a:rPr>
+              <a:t>Volume </a:t>
+            </a:r>
+          </a:p>
+          <a:p>
+            <a:pPr marL="342883" indent="-342883">
+              <a:buFont typeface="Arial" panose="020B0604020202020204" pitchFamily="34" charset="0"/>
+              <a:buChar char="•"/>
+            </a:pPr>
+            <a:r>
+              <a:rPr lang="en-US" sz="2372" dirty="0" smtClean="0">
+                <a:solidFill>
+                  <a:schemeClr val="tx1"/>
+                </a:solidFill>
+                <a:latin typeface="Times New Roman" panose="02020603050405020304" pitchFamily="18" charset="0"/>
+                <a:cs typeface="Times New Roman" panose="02020603050405020304" pitchFamily="18" charset="0"/>
+              </a:rPr>
+              <a:t>Cost (capital + running)</a:t>
+            </a:r>
+          </a:p>
+          <a:p>
+            <a:pPr marL="342883" indent="-342883">
+              <a:buFont typeface="Arial" panose="020B0604020202020204" pitchFamily="34" charset="0"/>
+              <a:buChar char="•"/>
+            </a:pPr>
+            <a:r>
+              <a:rPr lang="en-US" sz="2372" dirty="0" smtClean="0">
+                <a:solidFill>
+                  <a:schemeClr val="tx1"/>
+                </a:solidFill>
+                <a:latin typeface="Times New Roman" panose="02020603050405020304" pitchFamily="18" charset="0"/>
+                <a:cs typeface="Times New Roman" panose="02020603050405020304" pitchFamily="18" charset="0"/>
+              </a:rPr>
+              <a:t>Carbon Emission (capital </a:t>
+            </a:r>
+            <a:r>
+              <a:rPr lang="en-US" sz="2372" dirty="0">
+                <a:solidFill>
+                  <a:schemeClr val="tx1"/>
+                </a:solidFill>
+                <a:latin typeface="Times New Roman" panose="02020603050405020304" pitchFamily="18" charset="0"/>
+                <a:cs typeface="Times New Roman" panose="02020603050405020304" pitchFamily="18" charset="0"/>
+              </a:rPr>
+              <a:t>+ </a:t>
+            </a:r>
+            <a:r>
+              <a:rPr lang="en-US" sz="2372" dirty="0" smtClean="0">
+                <a:solidFill>
+                  <a:schemeClr val="tx1"/>
+                </a:solidFill>
+                <a:latin typeface="Times New Roman" panose="02020603050405020304" pitchFamily="18" charset="0"/>
+                <a:cs typeface="Times New Roman" panose="02020603050405020304" pitchFamily="18" charset="0"/>
+              </a:rPr>
+              <a:t>running)</a:t>
+            </a:r>
+            <a:endParaRPr lang="sv-SE" sz="2372" dirty="0">
+              <a:solidFill>
+                <a:schemeClr val="tx1"/>
+              </a:solidFill>
+              <a:latin typeface="Times New Roman" panose="02020603050405020304" pitchFamily="18" charset="0"/>
+              <a:cs typeface="Times New Roman" panose="02020603050405020304" pitchFamily="18" charset="0"/>
+            </a:endParaRPr>
+          </a:p>
+        </p:txBody>
+      </p:sp>
+      <p:cxnSp>
+        <p:nvCxnSpPr>
+          <p:cNvPr id="67" name="Straight Arrow Connector 66"/>
+          <p:cNvCxnSpPr>
+            <a:stCxn id="27" idx="2"/>
+            <a:endCxn id="66" idx="0"/>
+          </p:cNvCxnSpPr>
+          <p:nvPr/>
+        </p:nvCxnSpPr>
+        <p:spPr>
+          <a:xfrm>
+            <a:off x="13878888" y="22105465"/>
+            <a:ext cx="8562" cy="466929"/>
+          </a:xfrm>
+          <a:prstGeom prst="straightConnector1">
+            <a:avLst/>
+          </a:prstGeom>
+          <a:ln w="12700">
+            <a:solidFill>
+              <a:schemeClr val="tx1"/>
+            </a:solidFill>
+            <a:tailEnd type="triangle"/>
+          </a:ln>
+        </p:spPr>
+        <p:style>
+          <a:lnRef idx="1">
+            <a:schemeClr val="accent1"/>
+          </a:lnRef>
+          <a:fillRef idx="0">
+            <a:schemeClr val="accent1"/>
+          </a:fillRef>
+          <a:effectRef idx="0">
+            <a:schemeClr val="accent1"/>
+          </a:effectRef>
+          <a:fontRef idx="minor">
+            <a:schemeClr val="tx1"/>
+          </a:fontRef>
+        </p:style>
+      </p:cxnSp>
+      <p:sp>
+        <p:nvSpPr>
+          <p:cNvPr id="68" name="Rectangle 67"/>
+          <p:cNvSpPr/>
+          <p:nvPr/>
+        </p:nvSpPr>
+        <p:spPr>
+          <a:xfrm>
+            <a:off x="2849459" y="12831994"/>
+            <a:ext cx="2191385" cy="873537"/>
+          </a:xfrm>
+          <a:prstGeom prst="rect">
+            <a:avLst/>
+          </a:prstGeom>
+          <a:noFill/>
+          <a:ln>
+            <a:solidFill>
+              <a:schemeClr val="tx1"/>
+            </a:solidFill>
+          </a:ln>
+        </p:spPr>
+        <p:style>
+          <a:lnRef idx="2">
+            <a:schemeClr val="accent1">
+              <a:shade val="50000"/>
+            </a:schemeClr>
+          </a:lnRef>
+          <a:fillRef idx="1">
+            <a:schemeClr val="accent1"/>
+          </a:fillRef>
+          <a:effectRef idx="0">
+            <a:schemeClr val="accent1"/>
+          </a:effectRef>
+          <a:fontRef idx="minor">
+            <a:schemeClr val="lt1"/>
+          </a:fontRef>
+        </p:style>
+        <p:txBody>
+          <a:bodyPr rot="0" spcFirstLastPara="0" vertOverflow="overflow" horzOverflow="overflow" vert="horz" wrap="square" lIns="91440" tIns="45720" rIns="91440" bIns="45720" numCol="1" spcCol="0" rtlCol="0" fromWordArt="0" anchor="ctr" anchorCtr="0" forceAA="0" compatLnSpc="1">
+            <a:prstTxWarp prst="textNoShape">
+              <a:avLst/>
+            </a:prstTxWarp>
+            <a:noAutofit/>
+          </a:bodyPr>
+          <a:lstStyle/>
+          <a:p>
+            <a:pPr algn="ctr"/>
+            <a:r>
+              <a:rPr lang="en-US" sz="2372" dirty="0" smtClean="0">
+                <a:solidFill>
+                  <a:schemeClr val="tx1"/>
+                </a:solidFill>
+                <a:latin typeface="Times New Roman" panose="02020603050405020304" pitchFamily="18" charset="0"/>
+                <a:cs typeface="Times New Roman" panose="02020603050405020304" pitchFamily="18" charset="0"/>
+              </a:rPr>
+              <a:t>Reliability </a:t>
+            </a:r>
+            <a:endParaRPr lang="en-US" sz="2372" dirty="0">
+              <a:solidFill>
+                <a:schemeClr val="tx1"/>
+              </a:solidFill>
+              <a:latin typeface="Times New Roman" panose="02020603050405020304" pitchFamily="18" charset="0"/>
+              <a:cs typeface="Times New Roman" panose="02020603050405020304" pitchFamily="18" charset="0"/>
+            </a:endParaRPr>
+          </a:p>
+        </p:txBody>
+      </p:sp>
+      <p:cxnSp>
+        <p:nvCxnSpPr>
+          <p:cNvPr id="69" name="Straight Arrow Connector 68"/>
+          <p:cNvCxnSpPr>
+            <a:stCxn id="84" idx="2"/>
+            <a:endCxn id="77" idx="0"/>
+          </p:cNvCxnSpPr>
+          <p:nvPr/>
+        </p:nvCxnSpPr>
+        <p:spPr>
+          <a:xfrm flipH="1">
+            <a:off x="3919642" y="15417422"/>
+            <a:ext cx="25510" cy="1018225"/>
+          </a:xfrm>
+          <a:prstGeom prst="straightConnector1">
+            <a:avLst/>
+          </a:prstGeom>
+          <a:ln w="12700">
+            <a:solidFill>
+              <a:schemeClr val="tx1"/>
+            </a:solidFill>
+            <a:tailEnd type="triangle"/>
+          </a:ln>
+        </p:spPr>
+        <p:style>
+          <a:lnRef idx="1">
+            <a:schemeClr val="accent1"/>
+          </a:lnRef>
+          <a:fillRef idx="0">
+            <a:schemeClr val="accent1"/>
+          </a:fillRef>
+          <a:effectRef idx="0">
+            <a:schemeClr val="accent1"/>
+          </a:effectRef>
+          <a:fontRef idx="minor">
+            <a:schemeClr val="tx1"/>
+          </a:fontRef>
+        </p:style>
+      </p:cxnSp>
+      <p:sp>
+        <p:nvSpPr>
+          <p:cNvPr id="70" name="Rectangle 69"/>
+          <p:cNvSpPr/>
+          <p:nvPr/>
+        </p:nvSpPr>
+        <p:spPr>
+          <a:xfrm>
+            <a:off x="2850021" y="18266057"/>
+            <a:ext cx="2191385" cy="873537"/>
+          </a:xfrm>
+          <a:prstGeom prst="rect">
+            <a:avLst/>
+          </a:prstGeom>
+          <a:solidFill>
+            <a:srgbClr val="CC0000">
+              <a:alpha val="20000"/>
+            </a:srgbClr>
+          </a:solidFill>
+          <a:ln>
+            <a:solidFill>
+              <a:schemeClr val="tx1"/>
+            </a:solidFill>
+          </a:ln>
+        </p:spPr>
+        <p:style>
+          <a:lnRef idx="2">
+            <a:schemeClr val="accent1">
+              <a:shade val="50000"/>
+            </a:schemeClr>
+          </a:lnRef>
+          <a:fillRef idx="1">
+            <a:schemeClr val="accent1"/>
+          </a:fillRef>
+          <a:effectRef idx="0">
+            <a:schemeClr val="accent1"/>
+          </a:effectRef>
+          <a:fontRef idx="minor">
+            <a:schemeClr val="lt1"/>
+          </a:fontRef>
+        </p:style>
+        <p:txBody>
+          <a:bodyPr rot="0" spcFirstLastPara="0" vertOverflow="overflow" horzOverflow="overflow" vert="horz" wrap="square" lIns="91440" tIns="45720" rIns="91440" bIns="45720" numCol="1" spcCol="0" rtlCol="0" fromWordArt="0" anchor="ctr" anchorCtr="0" forceAA="0" compatLnSpc="1">
+            <a:prstTxWarp prst="textNoShape">
+              <a:avLst/>
+            </a:prstTxWarp>
+            <a:noAutofit/>
+          </a:bodyPr>
+          <a:lstStyle/>
+          <a:p>
+            <a:pPr algn="ctr"/>
+            <a:r>
+              <a:rPr lang="en-US" sz="2372" dirty="0" smtClean="0">
+                <a:solidFill>
+                  <a:schemeClr val="tx1"/>
+                </a:solidFill>
+                <a:latin typeface="Times New Roman" panose="02020603050405020304" pitchFamily="18" charset="0"/>
+                <a:cs typeface="Times New Roman" panose="02020603050405020304" pitchFamily="18" charset="0"/>
+              </a:rPr>
+              <a:t>Failure rate model </a:t>
+            </a:r>
+            <a:endParaRPr lang="en-US" sz="2372" dirty="0">
+              <a:solidFill>
+                <a:schemeClr val="tx1"/>
+              </a:solidFill>
+              <a:latin typeface="Times New Roman" panose="02020603050405020304" pitchFamily="18" charset="0"/>
+              <a:cs typeface="Times New Roman" panose="02020603050405020304" pitchFamily="18" charset="0"/>
+            </a:endParaRPr>
+          </a:p>
+        </p:txBody>
+      </p:sp>
+      <p:cxnSp>
+        <p:nvCxnSpPr>
+          <p:cNvPr id="71" name="Straight Arrow Connector 70"/>
+          <p:cNvCxnSpPr>
+            <a:stCxn id="70" idx="2"/>
+            <a:endCxn id="72" idx="0"/>
+          </p:cNvCxnSpPr>
+          <p:nvPr/>
+        </p:nvCxnSpPr>
+        <p:spPr>
+          <a:xfrm>
+            <a:off x="3945714" y="19139594"/>
+            <a:ext cx="24949" cy="2406469"/>
+          </a:xfrm>
+          <a:prstGeom prst="straightConnector1">
+            <a:avLst/>
+          </a:prstGeom>
+          <a:ln w="12700">
+            <a:solidFill>
+              <a:schemeClr val="tx1"/>
+            </a:solidFill>
+            <a:tailEnd type="triangle"/>
+          </a:ln>
+        </p:spPr>
+        <p:style>
+          <a:lnRef idx="1">
+            <a:schemeClr val="accent1"/>
+          </a:lnRef>
+          <a:fillRef idx="0">
+            <a:schemeClr val="accent1"/>
+          </a:fillRef>
+          <a:effectRef idx="0">
+            <a:schemeClr val="accent1"/>
+          </a:effectRef>
+          <a:fontRef idx="minor">
+            <a:schemeClr val="tx1"/>
+          </a:fontRef>
+        </p:style>
+      </p:cxnSp>
+      <p:sp>
+        <p:nvSpPr>
+          <p:cNvPr id="72" name="Rectangle 71"/>
+          <p:cNvSpPr/>
+          <p:nvPr/>
+        </p:nvSpPr>
+        <p:spPr>
+          <a:xfrm>
+            <a:off x="2066265" y="21546063"/>
+            <a:ext cx="3808796" cy="544192"/>
+          </a:xfrm>
+          <a:prstGeom prst="rect">
+            <a:avLst/>
+          </a:prstGeom>
+          <a:noFill/>
+          <a:ln>
+            <a:solidFill>
+              <a:schemeClr val="tx1"/>
+            </a:solidFill>
+          </a:ln>
+        </p:spPr>
+        <p:style>
+          <a:lnRef idx="2">
+            <a:schemeClr val="accent1">
+              <a:shade val="50000"/>
+            </a:schemeClr>
+          </a:lnRef>
+          <a:fillRef idx="1">
+            <a:schemeClr val="accent1"/>
+          </a:fillRef>
+          <a:effectRef idx="0">
+            <a:schemeClr val="accent1"/>
+          </a:effectRef>
+          <a:fontRef idx="minor">
+            <a:schemeClr val="lt1"/>
+          </a:fontRef>
+        </p:style>
+        <p:txBody>
+          <a:bodyPr rot="0" spcFirstLastPara="0" vertOverflow="overflow" horzOverflow="overflow" vert="horz" wrap="square" lIns="91440" tIns="45720" rIns="91440" bIns="45720" numCol="1" spcCol="0" rtlCol="0" fromWordArt="0" anchor="ctr" anchorCtr="0" forceAA="0" compatLnSpc="1">
+            <a:prstTxWarp prst="textNoShape">
+              <a:avLst/>
+            </a:prstTxWarp>
+            <a:noAutofit/>
+          </a:bodyPr>
+          <a:lstStyle/>
+          <a:p>
+            <a:pPr algn="ctr"/>
+            <a:r>
+              <a:rPr lang="en-US" sz="2372" dirty="0" smtClean="0">
+                <a:solidFill>
+                  <a:schemeClr val="tx1"/>
+                </a:solidFill>
+                <a:latin typeface="Times New Roman" panose="02020603050405020304" pitchFamily="18" charset="0"/>
+                <a:cs typeface="Times New Roman" panose="02020603050405020304" pitchFamily="18" charset="0"/>
+              </a:rPr>
+              <a:t>Failure in rate</a:t>
+            </a:r>
+            <a:endParaRPr lang="en-US" sz="2372" dirty="0">
+              <a:solidFill>
+                <a:schemeClr val="tx1"/>
+              </a:solidFill>
+              <a:latin typeface="Times New Roman" panose="02020603050405020304" pitchFamily="18" charset="0"/>
+              <a:cs typeface="Times New Roman" panose="02020603050405020304" pitchFamily="18" charset="0"/>
+            </a:endParaRPr>
+          </a:p>
+        </p:txBody>
+      </p:sp>
+      <p:cxnSp>
+        <p:nvCxnSpPr>
+          <p:cNvPr id="73" name="Straight Arrow Connector 72"/>
+          <p:cNvCxnSpPr>
+            <a:stCxn id="79" idx="2"/>
+          </p:cNvCxnSpPr>
+          <p:nvPr/>
+        </p:nvCxnSpPr>
+        <p:spPr>
+          <a:xfrm>
+            <a:off x="3916610" y="17638996"/>
+            <a:ext cx="9707" cy="667365"/>
+          </a:xfrm>
+          <a:prstGeom prst="straightConnector1">
+            <a:avLst/>
+          </a:prstGeom>
+          <a:ln w="12700">
+            <a:solidFill>
+              <a:schemeClr val="tx1"/>
+            </a:solidFill>
+            <a:tailEnd type="triangle"/>
+          </a:ln>
+        </p:spPr>
+        <p:style>
+          <a:lnRef idx="1">
+            <a:schemeClr val="accent1"/>
+          </a:lnRef>
+          <a:fillRef idx="0">
+            <a:schemeClr val="accent1"/>
+          </a:fillRef>
+          <a:effectRef idx="0">
+            <a:schemeClr val="accent1"/>
+          </a:effectRef>
+          <a:fontRef idx="minor">
+            <a:schemeClr val="tx1"/>
+          </a:fontRef>
+        </p:style>
+      </p:cxnSp>
+      <p:cxnSp>
+        <p:nvCxnSpPr>
+          <p:cNvPr id="74" name="Straight Arrow Connector 73"/>
+          <p:cNvCxnSpPr>
+            <a:stCxn id="66" idx="1"/>
+          </p:cNvCxnSpPr>
+          <p:nvPr/>
+        </p:nvCxnSpPr>
+        <p:spPr>
+          <a:xfrm flipH="1">
+            <a:off x="1395644" y="23446169"/>
+            <a:ext cx="9786706" cy="36905"/>
+          </a:xfrm>
+          <a:prstGeom prst="straightConnector1">
+            <a:avLst/>
+          </a:prstGeom>
+          <a:ln w="12700">
+            <a:solidFill>
+              <a:schemeClr val="tx1"/>
+            </a:solidFill>
+            <a:tailEnd type="triangle"/>
+          </a:ln>
+        </p:spPr>
+        <p:style>
+          <a:lnRef idx="1">
+            <a:schemeClr val="accent1"/>
+          </a:lnRef>
+          <a:fillRef idx="0">
+            <a:schemeClr val="accent1"/>
+          </a:fillRef>
+          <a:effectRef idx="0">
+            <a:schemeClr val="accent1"/>
+          </a:effectRef>
+          <a:fontRef idx="minor">
+            <a:schemeClr val="tx1"/>
+          </a:fontRef>
+        </p:style>
+      </p:cxnSp>
+      <p:cxnSp>
+        <p:nvCxnSpPr>
+          <p:cNvPr id="75" name="Straight Arrow Connector 74"/>
+          <p:cNvCxnSpPr>
+            <a:endCxn id="68" idx="1"/>
+          </p:cNvCxnSpPr>
+          <p:nvPr/>
+        </p:nvCxnSpPr>
+        <p:spPr>
+          <a:xfrm flipV="1">
+            <a:off x="1439120" y="13268763"/>
+            <a:ext cx="1410339" cy="22973"/>
+          </a:xfrm>
+          <a:prstGeom prst="straightConnector1">
+            <a:avLst/>
+          </a:prstGeom>
+          <a:ln w="12700">
+            <a:solidFill>
+              <a:schemeClr val="tx1"/>
+            </a:solidFill>
+            <a:tailEnd type="triangle"/>
+          </a:ln>
+        </p:spPr>
+        <p:style>
+          <a:lnRef idx="1">
+            <a:schemeClr val="accent1"/>
+          </a:lnRef>
+          <a:fillRef idx="0">
+            <a:schemeClr val="accent1"/>
+          </a:fillRef>
+          <a:effectRef idx="0">
+            <a:schemeClr val="accent1"/>
+          </a:effectRef>
+          <a:fontRef idx="minor">
+            <a:schemeClr val="tx1"/>
+          </a:fontRef>
+        </p:style>
+      </p:cxnSp>
+      <p:cxnSp>
+        <p:nvCxnSpPr>
+          <p:cNvPr id="76" name="Straight Arrow Connector 75"/>
+          <p:cNvCxnSpPr/>
+          <p:nvPr/>
+        </p:nvCxnSpPr>
+        <p:spPr>
+          <a:xfrm flipV="1">
+            <a:off x="1395643" y="13281393"/>
+            <a:ext cx="97750" cy="10190720"/>
+          </a:xfrm>
+          <a:prstGeom prst="straightConnector1">
+            <a:avLst/>
+          </a:prstGeom>
+          <a:ln w="12700">
+            <a:solidFill>
+              <a:schemeClr val="tx1"/>
+            </a:solidFill>
+            <a:tailEnd type="triangle"/>
+          </a:ln>
+        </p:spPr>
+        <p:style>
+          <a:lnRef idx="1">
+            <a:schemeClr val="accent1"/>
+          </a:lnRef>
+          <a:fillRef idx="0">
+            <a:schemeClr val="accent1"/>
+          </a:fillRef>
+          <a:effectRef idx="0">
+            <a:schemeClr val="accent1"/>
+          </a:effectRef>
+          <a:fontRef idx="minor">
+            <a:schemeClr val="tx1"/>
+          </a:fontRef>
+        </p:style>
+      </p:cxnSp>
+      <p:sp>
+        <p:nvSpPr>
+          <p:cNvPr id="77" name="Rectangle 76"/>
+          <p:cNvSpPr/>
+          <p:nvPr/>
+        </p:nvSpPr>
+        <p:spPr>
+          <a:xfrm>
+            <a:off x="2789501" y="16435647"/>
+            <a:ext cx="2260282" cy="434191"/>
+          </a:xfrm>
+          <a:prstGeom prst="rect">
+            <a:avLst/>
+          </a:prstGeom>
+          <a:solidFill>
+            <a:srgbClr val="CC0099">
+              <a:alpha val="20000"/>
+            </a:srgbClr>
+          </a:solidFill>
+          <a:ln>
+            <a:solidFill>
+              <a:schemeClr val="tx1"/>
+            </a:solidFill>
+          </a:ln>
+        </p:spPr>
+        <p:style>
+          <a:lnRef idx="2">
+            <a:schemeClr val="accent1">
+              <a:shade val="50000"/>
+            </a:schemeClr>
+          </a:lnRef>
+          <a:fillRef idx="1">
+            <a:schemeClr val="accent1"/>
+          </a:fillRef>
+          <a:effectRef idx="0">
+            <a:schemeClr val="accent1"/>
+          </a:effectRef>
+          <a:fontRef idx="minor">
+            <a:schemeClr val="lt1"/>
+          </a:fontRef>
+        </p:style>
+        <p:txBody>
+          <a:bodyPr rot="0" spcFirstLastPara="0" vertOverflow="overflow" horzOverflow="overflow" vert="horz" wrap="square" lIns="91440" tIns="45720" rIns="91440" bIns="45720" numCol="1" spcCol="0" rtlCol="0" fromWordArt="0" anchor="ctr" anchorCtr="0" forceAA="0" compatLnSpc="1">
+            <a:prstTxWarp prst="textNoShape">
+              <a:avLst/>
+            </a:prstTxWarp>
+            <a:noAutofit/>
+          </a:bodyPr>
+          <a:lstStyle/>
+          <a:p>
+            <a:pPr algn="ctr"/>
+            <a:r>
+              <a:rPr lang="en-US" sz="2372" dirty="0">
+                <a:solidFill>
+                  <a:schemeClr val="tx1"/>
+                </a:solidFill>
+                <a:latin typeface="Times New Roman" panose="02020603050405020304" pitchFamily="18" charset="0"/>
+                <a:cs typeface="Times New Roman" panose="02020603050405020304" pitchFamily="18" charset="0"/>
+              </a:rPr>
+              <a:t>Loss Model</a:t>
+            </a:r>
+          </a:p>
+        </p:txBody>
+      </p:sp>
+      <p:cxnSp>
+        <p:nvCxnSpPr>
+          <p:cNvPr id="78" name="Straight Arrow Connector 77"/>
+          <p:cNvCxnSpPr>
+            <a:stCxn id="77" idx="2"/>
+            <a:endCxn id="79" idx="0"/>
+          </p:cNvCxnSpPr>
+          <p:nvPr/>
+        </p:nvCxnSpPr>
+        <p:spPr>
+          <a:xfrm flipH="1">
+            <a:off x="3916608" y="16869838"/>
+            <a:ext cx="3032" cy="334967"/>
+          </a:xfrm>
+          <a:prstGeom prst="straightConnector1">
+            <a:avLst/>
+          </a:prstGeom>
+          <a:ln w="12700">
+            <a:solidFill>
+              <a:schemeClr val="tx1"/>
+            </a:solidFill>
+            <a:tailEnd type="triangle"/>
+          </a:ln>
+        </p:spPr>
+        <p:style>
+          <a:lnRef idx="1">
+            <a:schemeClr val="accent1"/>
+          </a:lnRef>
+          <a:fillRef idx="0">
+            <a:schemeClr val="accent1"/>
+          </a:fillRef>
+          <a:effectRef idx="0">
+            <a:schemeClr val="accent1"/>
+          </a:effectRef>
+          <a:fontRef idx="minor">
+            <a:schemeClr val="tx1"/>
+          </a:fontRef>
+        </p:style>
+      </p:cxnSp>
+      <p:sp>
+        <p:nvSpPr>
+          <p:cNvPr id="79" name="Rectangle 78"/>
+          <p:cNvSpPr/>
+          <p:nvPr/>
+        </p:nvSpPr>
+        <p:spPr>
+          <a:xfrm>
+            <a:off x="2783437" y="17204805"/>
+            <a:ext cx="2266346" cy="434191"/>
+          </a:xfrm>
+          <a:prstGeom prst="rect">
+            <a:avLst/>
+          </a:prstGeom>
+          <a:solidFill>
+            <a:srgbClr val="CC0099">
+              <a:alpha val="20000"/>
+            </a:srgbClr>
+          </a:solidFill>
+          <a:ln>
+            <a:solidFill>
+              <a:schemeClr val="tx1"/>
+            </a:solidFill>
+          </a:ln>
+        </p:spPr>
+        <p:style>
+          <a:lnRef idx="2">
+            <a:schemeClr val="accent1">
+              <a:shade val="50000"/>
+            </a:schemeClr>
+          </a:lnRef>
+          <a:fillRef idx="1">
+            <a:schemeClr val="accent1"/>
+          </a:fillRef>
+          <a:effectRef idx="0">
+            <a:schemeClr val="accent1"/>
+          </a:effectRef>
+          <a:fontRef idx="minor">
+            <a:schemeClr val="lt1"/>
+          </a:fontRef>
+        </p:style>
+        <p:txBody>
+          <a:bodyPr rot="0" spcFirstLastPara="0" vertOverflow="overflow" horzOverflow="overflow" vert="horz" wrap="square" lIns="91440" tIns="45720" rIns="91440" bIns="45720" numCol="1" spcCol="0" rtlCol="0" fromWordArt="0" anchor="ctr" anchorCtr="0" forceAA="0" compatLnSpc="1">
+            <a:prstTxWarp prst="textNoShape">
+              <a:avLst/>
+            </a:prstTxWarp>
+            <a:noAutofit/>
+          </a:bodyPr>
+          <a:lstStyle/>
+          <a:p>
+            <a:pPr algn="ctr"/>
+            <a:r>
+              <a:rPr lang="en-US" sz="2372" dirty="0">
+                <a:solidFill>
+                  <a:schemeClr val="tx1"/>
+                </a:solidFill>
+                <a:latin typeface="Times New Roman" panose="02020603050405020304" pitchFamily="18" charset="0"/>
+                <a:cs typeface="Times New Roman" panose="02020603050405020304" pitchFamily="18" charset="0"/>
+              </a:rPr>
+              <a:t>Thermal Model</a:t>
+            </a:r>
+          </a:p>
+        </p:txBody>
+      </p:sp>
+      <p:cxnSp>
+        <p:nvCxnSpPr>
+          <p:cNvPr id="80" name="Straight Connector 79"/>
+          <p:cNvCxnSpPr/>
+          <p:nvPr/>
+        </p:nvCxnSpPr>
+        <p:spPr>
+          <a:xfrm>
+            <a:off x="2436204" y="17421895"/>
+            <a:ext cx="357734" cy="0"/>
+          </a:xfrm>
+          <a:prstGeom prst="line">
+            <a:avLst/>
+          </a:prstGeom>
+          <a:ln w="12700">
+            <a:solidFill>
+              <a:schemeClr val="tx1"/>
+            </a:solidFill>
+          </a:ln>
+        </p:spPr>
+        <p:style>
+          <a:lnRef idx="1">
+            <a:schemeClr val="accent1"/>
+          </a:lnRef>
+          <a:fillRef idx="0">
+            <a:schemeClr val="accent1"/>
+          </a:fillRef>
+          <a:effectRef idx="0">
+            <a:schemeClr val="accent1"/>
+          </a:effectRef>
+          <a:fontRef idx="minor">
+            <a:schemeClr val="tx1"/>
+          </a:fontRef>
+        </p:style>
+      </p:cxnSp>
+      <p:cxnSp>
+        <p:nvCxnSpPr>
+          <p:cNvPr id="81" name="Straight Arrow Connector 80"/>
+          <p:cNvCxnSpPr>
+            <a:endCxn id="77" idx="1"/>
+          </p:cNvCxnSpPr>
+          <p:nvPr/>
+        </p:nvCxnSpPr>
+        <p:spPr>
+          <a:xfrm>
+            <a:off x="2425699" y="16652739"/>
+            <a:ext cx="363800" cy="0"/>
+          </a:xfrm>
+          <a:prstGeom prst="straightConnector1">
+            <a:avLst/>
+          </a:prstGeom>
+          <a:ln w="12700">
+            <a:solidFill>
+              <a:schemeClr val="tx1"/>
+            </a:solidFill>
+            <a:tailEnd type="triangle"/>
+          </a:ln>
+        </p:spPr>
+        <p:style>
+          <a:lnRef idx="1">
+            <a:schemeClr val="accent1"/>
+          </a:lnRef>
+          <a:fillRef idx="0">
+            <a:schemeClr val="accent1"/>
+          </a:fillRef>
+          <a:effectRef idx="0">
+            <a:schemeClr val="accent1"/>
+          </a:effectRef>
+          <a:fontRef idx="minor">
+            <a:schemeClr val="tx1"/>
+          </a:fontRef>
+        </p:style>
+      </p:cxnSp>
+      <p:cxnSp>
+        <p:nvCxnSpPr>
+          <p:cNvPr id="82" name="Straight Connector 81"/>
+          <p:cNvCxnSpPr/>
+          <p:nvPr/>
+        </p:nvCxnSpPr>
+        <p:spPr>
+          <a:xfrm>
+            <a:off x="2425695" y="16652744"/>
+            <a:ext cx="0" cy="769156"/>
+          </a:xfrm>
+          <a:prstGeom prst="line">
+            <a:avLst/>
+          </a:prstGeom>
+          <a:ln w="12700">
+            <a:solidFill>
+              <a:schemeClr val="tx1"/>
+            </a:solidFill>
+          </a:ln>
+        </p:spPr>
+        <p:style>
+          <a:lnRef idx="1">
+            <a:schemeClr val="accent1"/>
+          </a:lnRef>
+          <a:fillRef idx="0">
+            <a:schemeClr val="accent1"/>
+          </a:fillRef>
+          <a:effectRef idx="0">
+            <a:schemeClr val="accent1"/>
+          </a:effectRef>
+          <a:fontRef idx="minor">
+            <a:schemeClr val="tx1"/>
+          </a:fontRef>
+        </p:style>
+      </p:cxnSp>
+      <p:sp>
+        <p:nvSpPr>
+          <p:cNvPr id="83" name="TextBox 82"/>
+          <p:cNvSpPr txBox="1"/>
+          <p:nvPr/>
+        </p:nvSpPr>
+        <p:spPr>
+          <a:xfrm>
+            <a:off x="1565212" y="16704530"/>
+            <a:ext cx="1052808" cy="646331"/>
+          </a:xfrm>
+          <a:prstGeom prst="rect">
+            <a:avLst/>
+          </a:prstGeom>
+          <a:noFill/>
+        </p:spPr>
+        <p:txBody>
+          <a:bodyPr wrap="square" rtlCol="0">
+            <a:spAutoFit/>
+          </a:bodyPr>
+          <a:lstStyle/>
+          <a:p>
+            <a:r>
+              <a:rPr lang="en-US" dirty="0">
+                <a:latin typeface="Times New Roman" panose="02020603050405020304" pitchFamily="18" charset="0"/>
+                <a:cs typeface="Times New Roman" panose="02020603050405020304" pitchFamily="18" charset="0"/>
+              </a:rPr>
+              <a:t>Junction Temp</a:t>
+            </a:r>
+            <a:endParaRPr lang="sv-SE" dirty="0">
+              <a:latin typeface="Times New Roman" panose="02020603050405020304" pitchFamily="18" charset="0"/>
+              <a:cs typeface="Times New Roman" panose="02020603050405020304" pitchFamily="18" charset="0"/>
+            </a:endParaRPr>
+          </a:p>
+        </p:txBody>
+      </p:sp>
+      <p:sp>
+        <p:nvSpPr>
+          <p:cNvPr id="84" name="Rectangle 83"/>
+          <p:cNvSpPr/>
+          <p:nvPr/>
+        </p:nvSpPr>
+        <p:spPr>
+          <a:xfrm>
+            <a:off x="2849459" y="14543885"/>
+            <a:ext cx="2191385" cy="873537"/>
+          </a:xfrm>
+          <a:prstGeom prst="rect">
+            <a:avLst/>
+          </a:prstGeom>
+          <a:solidFill>
+            <a:srgbClr val="C00000">
+              <a:alpha val="20000"/>
+            </a:srgbClr>
+          </a:solidFill>
+          <a:ln>
+            <a:solidFill>
+              <a:schemeClr val="tx1"/>
+            </a:solidFill>
+          </a:ln>
+        </p:spPr>
+        <p:style>
+          <a:lnRef idx="2">
+            <a:schemeClr val="accent1">
+              <a:shade val="50000"/>
+            </a:schemeClr>
+          </a:lnRef>
+          <a:fillRef idx="1">
+            <a:schemeClr val="accent1"/>
+          </a:fillRef>
+          <a:effectRef idx="0">
+            <a:schemeClr val="accent1"/>
+          </a:effectRef>
+          <a:fontRef idx="minor">
+            <a:schemeClr val="lt1"/>
+          </a:fontRef>
+        </p:style>
+        <p:txBody>
+          <a:bodyPr rot="0" spcFirstLastPara="0" vertOverflow="overflow" horzOverflow="overflow" vert="horz" wrap="square" lIns="91440" tIns="45720" rIns="91440" bIns="45720" numCol="1" spcCol="0" rtlCol="0" fromWordArt="0" anchor="ctr" anchorCtr="0" forceAA="0" compatLnSpc="1">
+            <a:prstTxWarp prst="textNoShape">
+              <a:avLst/>
+            </a:prstTxWarp>
+            <a:noAutofit/>
+          </a:bodyPr>
+          <a:lstStyle/>
+          <a:p>
+            <a:pPr algn="ctr"/>
+            <a:r>
+              <a:rPr lang="en-US" sz="2372" dirty="0" smtClean="0">
+                <a:solidFill>
+                  <a:schemeClr val="tx1"/>
+                </a:solidFill>
+                <a:latin typeface="Times New Roman" panose="02020603050405020304" pitchFamily="18" charset="0"/>
+                <a:cs typeface="Times New Roman" panose="02020603050405020304" pitchFamily="18" charset="0"/>
+              </a:rPr>
+              <a:t>Drive Cycle </a:t>
+            </a:r>
+          </a:p>
+          <a:p>
+            <a:pPr algn="ctr"/>
+            <a:r>
+              <a:rPr lang="en-US" sz="2372" dirty="0" smtClean="0">
+                <a:solidFill>
+                  <a:schemeClr val="tx1"/>
+                </a:solidFill>
+                <a:latin typeface="Times New Roman" panose="02020603050405020304" pitchFamily="18" charset="0"/>
+                <a:cs typeface="Times New Roman" panose="02020603050405020304" pitchFamily="18" charset="0"/>
+              </a:rPr>
+              <a:t>Model</a:t>
+            </a:r>
+            <a:endParaRPr lang="en-US" sz="2372" dirty="0">
+              <a:solidFill>
+                <a:schemeClr val="tx1"/>
+              </a:solidFill>
+              <a:latin typeface="Times New Roman" panose="02020603050405020304" pitchFamily="18" charset="0"/>
+              <a:cs typeface="Times New Roman" panose="02020603050405020304" pitchFamily="18" charset="0"/>
+            </a:endParaRPr>
+          </a:p>
+        </p:txBody>
+      </p:sp>
+      <p:cxnSp>
+        <p:nvCxnSpPr>
+          <p:cNvPr id="85" name="Straight Arrow Connector 84"/>
+          <p:cNvCxnSpPr>
+            <a:stCxn id="68" idx="2"/>
+            <a:endCxn id="84" idx="0"/>
+          </p:cNvCxnSpPr>
+          <p:nvPr/>
+        </p:nvCxnSpPr>
+        <p:spPr>
+          <a:xfrm>
+            <a:off x="3945152" y="13705531"/>
+            <a:ext cx="0" cy="838354"/>
+          </a:xfrm>
+          <a:prstGeom prst="straightConnector1">
+            <a:avLst/>
+          </a:prstGeom>
+          <a:ln w="12700">
+            <a:solidFill>
+              <a:schemeClr val="tx1"/>
+            </a:solidFill>
+            <a:tailEnd type="triangle"/>
+          </a:ln>
+        </p:spPr>
+        <p:style>
+          <a:lnRef idx="1">
+            <a:schemeClr val="accent1"/>
+          </a:lnRef>
+          <a:fillRef idx="0">
+            <a:schemeClr val="accent1"/>
+          </a:fillRef>
+          <a:effectRef idx="0">
+            <a:schemeClr val="accent1"/>
+          </a:effectRef>
+          <a:fontRef idx="minor">
+            <a:schemeClr val="tx1"/>
+          </a:fontRef>
+        </p:style>
+      </p:cxnSp>
+      <p:cxnSp>
+        <p:nvCxnSpPr>
+          <p:cNvPr id="86" name="Straight Arrow Connector 85"/>
+          <p:cNvCxnSpPr/>
+          <p:nvPr/>
+        </p:nvCxnSpPr>
+        <p:spPr>
+          <a:xfrm>
+            <a:off x="3869407" y="22956413"/>
+            <a:ext cx="7312943" cy="10992"/>
+          </a:xfrm>
+          <a:prstGeom prst="straightConnector1">
+            <a:avLst/>
+          </a:prstGeom>
+          <a:ln w="12700">
+            <a:solidFill>
+              <a:schemeClr val="tx1"/>
+            </a:solidFill>
+            <a:tailEnd type="triangle"/>
+          </a:ln>
+        </p:spPr>
+        <p:style>
+          <a:lnRef idx="1">
+            <a:schemeClr val="accent1"/>
+          </a:lnRef>
+          <a:fillRef idx="0">
+            <a:schemeClr val="accent1"/>
+          </a:fillRef>
+          <a:effectRef idx="0">
+            <a:schemeClr val="accent1"/>
+          </a:effectRef>
+          <a:fontRef idx="minor">
+            <a:schemeClr val="tx1"/>
+          </a:fontRef>
+        </p:style>
+      </p:cxnSp>
+      <p:cxnSp>
+        <p:nvCxnSpPr>
+          <p:cNvPr id="87" name="Straight Arrow Connector 86"/>
+          <p:cNvCxnSpPr/>
+          <p:nvPr/>
+        </p:nvCxnSpPr>
+        <p:spPr>
+          <a:xfrm flipH="1">
+            <a:off x="3878014" y="22095945"/>
+            <a:ext cx="24987" cy="871460"/>
+          </a:xfrm>
+          <a:prstGeom prst="straightConnector1">
+            <a:avLst/>
+          </a:prstGeom>
+          <a:ln w="12700">
+            <a:solidFill>
+              <a:schemeClr val="tx1"/>
+            </a:solidFill>
+            <a:tailEnd type="triangle"/>
+          </a:ln>
+        </p:spPr>
+        <p:style>
+          <a:lnRef idx="1">
+            <a:schemeClr val="accent1"/>
+          </a:lnRef>
+          <a:fillRef idx="0">
+            <a:schemeClr val="accent1"/>
+          </a:fillRef>
+          <a:effectRef idx="0">
+            <a:schemeClr val="accent1"/>
+          </a:effectRef>
+          <a:fontRef idx="minor">
+            <a:schemeClr val="tx1"/>
+          </a:fontRef>
+        </p:style>
+      </p:cxnSp>
     </p:spTree>
     <p:extLst>
       <p:ext uri="{BB962C8B-B14F-4D97-AF65-F5344CB8AC3E}">
